--- a/site/SecondBrain-Bilibili.pptx
+++ b/site/SecondBrain-Bilibili.pptx
@@ -21,6 +21,8 @@
     <p:sldId id="269" r:id="rId20"/>
     <p:sldId id="270" r:id="rId21"/>
     <p:sldId id="271" r:id="rId22"/>
+    <p:sldId id="272" r:id="rId23"/>
+    <p:sldId id="273" r:id="rId24"/>
   </p:sldIdLst>
   <p:sldSz cx="12191695" cy="6858000" type="screen4x3"/>
   <p:notesSz cx="6858000" cy="9144000"/>
@@ -3099,7 +3101,7 @@
     <p:bg>
       <p:bgPr>
         <a:solidFill>
-          <a:srgbClr val="1E1E2E"/>
+          <a:srgbClr val="F8F7FC"/>
         </a:solidFill>
         <a:effectLst/>
       </p:bgPr>
@@ -3126,7 +3128,7 @@
             <a:avLst/>
           </a:prstGeom>
           <a:solidFill>
-            <a:srgbClr val="7058A5"/>
+            <a:srgbClr val="A78BFA"/>
           </a:solidFill>
           <a:ln>
             <a:noFill/>
@@ -3169,11 +3171,11 @@
             <a:avLst/>
           </a:prstGeom>
           <a:solidFill>
-            <a:srgbClr val="2A2445"/>
+            <a:srgbClr val="DDDBE5"/>
           </a:solidFill>
           <a:ln w="19050">
             <a:solidFill>
-              <a:srgbClr val="7058A5"/>
+              <a:srgbClr val="A78BFA"/>
             </a:solidFill>
           </a:ln>
         </p:spPr>
@@ -3201,7 +3203,7 @@
               </a:spcBef>
               <a:defRPr sz="1400">
                 <a:solidFill>
-                  <a:srgbClr val="A086DA"/>
+                  <a:srgbClr val="7C3AED"/>
                 </a:solidFill>
                 <a:latin typeface="Microsoft YaHei"/>
               </a:defRPr>
@@ -3237,7 +3239,7 @@
             <a:pPr algn="ctr">
               <a:defRPr sz="6400" b="1">
                 <a:solidFill>
-                  <a:srgbClr val="F5F5F5"/>
+                  <a:srgbClr val="1F2937"/>
                 </a:solidFill>
                 <a:latin typeface="Microsoft YaHei"/>
               </a:defRPr>
@@ -3273,7 +3275,7 @@
             <a:pPr algn="ctr">
               <a:defRPr sz="2800" b="0">
                 <a:solidFill>
-                  <a:srgbClr val="A086DA"/>
+                  <a:srgbClr val="7C3AED"/>
                 </a:solidFill>
                 <a:latin typeface="Microsoft YaHei"/>
               </a:defRPr>
@@ -3309,7 +3311,7 @@
             <a:pPr algn="ctr">
               <a:defRPr sz="2000" b="0">
                 <a:solidFill>
-                  <a:srgbClr val="9898B0"/>
+                  <a:srgbClr val="6B7280"/>
                 </a:solidFill>
                 <a:latin typeface="Microsoft YaHei"/>
               </a:defRPr>
@@ -3335,7 +3337,7 @@
             <a:avLst/>
           </a:prstGeom>
           <a:solidFill>
-            <a:srgbClr val="7058A5"/>
+            <a:srgbClr val="A78BFA"/>
           </a:solidFill>
           <a:ln>
             <a:noFill/>
@@ -3377,7 +3379,7 @@
     <p:bg>
       <p:bgPr>
         <a:solidFill>
-          <a:srgbClr val="1E1E2E"/>
+          <a:srgbClr val="F8F7FC"/>
         </a:solidFill>
         <a:effectLst/>
       </p:bgPr>
@@ -3398,17 +3400,17 @@
         <p:spPr>
           <a:xfrm>
             <a:off x="731520" y="457200"/>
-            <a:ext cx="2286000" cy="411480"/>
+            <a:ext cx="1828800" cy="411480"/>
           </a:xfrm>
           <a:prstGeom prst="roundRect">
             <a:avLst/>
           </a:prstGeom>
           <a:solidFill>
-            <a:srgbClr val="7058A5"/>
+            <a:srgbClr val="DDDBE5"/>
           </a:solidFill>
           <a:ln w="19050">
             <a:solidFill>
-              <a:srgbClr val="A086DA"/>
+              <a:srgbClr val="A78BFA"/>
             </a:solidFill>
           </a:ln>
         </p:spPr>
@@ -3436,13 +3438,13 @@
               </a:spcBef>
               <a:defRPr sz="1300">
                 <a:solidFill>
-                  <a:srgbClr val="F5F5F5"/>
-                </a:solidFill>
-                <a:latin typeface="Microsoft YaHei"/>
-              </a:defRPr>
-            </a:pPr>
-            <a:r>
-              <a:t>Full Version</a:t>
+                  <a:srgbClr val="7C3AED"/>
+                </a:solidFill>
+                <a:latin typeface="Microsoft YaHei"/>
+              </a:defRPr>
+            </a:pPr>
+            <a:r>
+              <a:t>核心功能</a:t>
             </a:r>
           </a:p>
         </p:txBody>
@@ -3472,70 +3474,27 @@
             <a:pPr algn="l">
               <a:defRPr sz="3600" b="1">
                 <a:solidFill>
-                  <a:srgbClr val="F5F5F5"/>
-                </a:solidFill>
-                <a:latin typeface="Microsoft YaHei"/>
-              </a:defRPr>
-            </a:pPr>
-            <a:r>
-              <a:t>AI 对话 -- 和你的知识库聊天</a:t>
-            </a:r>
-          </a:p>
-        </p:txBody>
-      </p:sp>
-      <p:sp>
-        <p:nvSpPr>
-          <p:cNvPr id="4" name="Rectangle 3"/>
-          <p:cNvSpPr/>
+                  <a:srgbClr val="1F2937"/>
+                </a:solidFill>
+                <a:latin typeface="Microsoft YaHei"/>
+              </a:defRPr>
+            </a:pPr>
+            <a:r>
+              <a:t>知识健康度检查 -- 给你的知识库“体检”</a:t>
+            </a:r>
+          </a:p>
+        </p:txBody>
+      </p:sp>
+      <p:sp>
+        <p:nvSpPr>
+          <p:cNvPr id="4" name="TextBox 3"/>
+          <p:cNvSpPr txBox="1"/>
           <p:nvPr/>
         </p:nvSpPr>
         <p:spPr>
           <a:xfrm>
             <a:off x="731520" y="1828800"/>
-            <a:ext cx="1828800" cy="25400"/>
-          </a:xfrm>
-          <a:prstGeom prst="rect">
-            <a:avLst/>
-          </a:prstGeom>
-          <a:solidFill>
-            <a:srgbClr val="A086DA"/>
-          </a:solidFill>
-          <a:ln>
-            <a:noFill/>
-          </a:ln>
-        </p:spPr>
-        <p:style>
-          <a:lnRef idx="1">
-            <a:schemeClr val="accent1"/>
-          </a:lnRef>
-          <a:fillRef idx="3">
-            <a:schemeClr val="accent1"/>
-          </a:fillRef>
-          <a:effectRef idx="2">
-            <a:schemeClr val="accent1"/>
-          </a:effectRef>
-          <a:fontRef idx="minor">
-            <a:schemeClr val="lt1"/>
-          </a:fontRef>
-        </p:style>
-        <p:txBody>
-          <a:bodyPr rtlCol="0" anchor="ctr"/>
-          <a:lstStyle/>
-          <a:p>
-            <a:pPr algn="ctr"/>
-          </a:p>
-        </p:txBody>
-      </p:sp>
-      <p:sp>
-        <p:nvSpPr>
-          <p:cNvPr id="5" name="TextBox 4"/>
-          <p:cNvSpPr txBox="1"/>
-          <p:nvPr/>
-        </p:nvSpPr>
-        <p:spPr>
-          <a:xfrm>
-            <a:off x="1097280" y="2286000"/>
-            <a:ext cx="9144000" cy="731520"/>
+            <a:ext cx="10058400" cy="548640"/>
           </a:xfrm>
           <a:prstGeom prst="rect">
             <a:avLst/>
@@ -3549,28 +3508,28 @@
           <a:lstStyle/>
           <a:p>
             <a:pPr algn="l">
-              <a:defRPr sz="2400" b="0">
-                <a:solidFill>
-                  <a:srgbClr val="DCDCDC"/>
-                </a:solidFill>
-                <a:latin typeface="Microsoft YaHei"/>
-              </a:defRPr>
-            </a:pPr>
-            <a:r>
-              <a:t>✓  针对你的知识库提问，AI 从你编译过的知识中找答案</a:t>
-            </a:r>
-          </a:p>
-        </p:txBody>
-      </p:sp>
-      <p:sp>
-        <p:nvSpPr>
-          <p:cNvPr id="6" name="TextBox 5"/>
+              <a:defRPr sz="1800" b="0">
+                <a:solidFill>
+                  <a:srgbClr val="6B7280"/>
+                </a:solidFill>
+                <a:latin typeface="Microsoft YaHei"/>
+              </a:defRPr>
+            </a:pPr>
+            <a:r>
+              <a:t>对应 Karpathy 的 lint 操作，自动扫描知识库发现问题</a:t>
+            </a:r>
+          </a:p>
+        </p:txBody>
+      </p:sp>
+      <p:sp>
+        <p:nvSpPr>
+          <p:cNvPr id="5" name="TextBox 4"/>
           <p:cNvSpPr txBox="1"/>
           <p:nvPr/>
         </p:nvSpPr>
         <p:spPr>
           <a:xfrm>
-            <a:off x="1097280" y="3200400"/>
+            <a:off x="1097280" y="2560320"/>
             <a:ext cx="9144000" cy="731520"/>
           </a:xfrm>
           <a:prstGeom prst="rect">
@@ -3587,26 +3546,26 @@
             <a:pPr algn="l">
               <a:defRPr sz="2400" b="0">
                 <a:solidFill>
-                  <a:srgbClr val="DCDCDC"/>
-                </a:solidFill>
-                <a:latin typeface="Microsoft YaHei"/>
-              </a:defRPr>
-            </a:pPr>
-            <a:r>
-              <a:t>✓  语义搜索：不是关键词匹配，而是理解你的意思</a:t>
-            </a:r>
-          </a:p>
-        </p:txBody>
-      </p:sp>
-      <p:sp>
-        <p:nvSpPr>
-          <p:cNvPr id="7" name="TextBox 6"/>
+                  <a:srgbClr val="374151"/>
+                </a:solidFill>
+                <a:latin typeface="Microsoft YaHei"/>
+              </a:defRPr>
+            </a:pPr>
+            <a:r>
+              <a:t>✓  检测孤岛页面：没有双向链接的独立概念</a:t>
+            </a:r>
+          </a:p>
+        </p:txBody>
+      </p:sp>
+      <p:sp>
+        <p:nvSpPr>
+          <p:cNvPr id="6" name="TextBox 5"/>
           <p:cNvSpPr txBox="1"/>
           <p:nvPr/>
         </p:nvSpPr>
         <p:spPr>
           <a:xfrm>
-            <a:off x="1097280" y="4114800"/>
+            <a:off x="1097280" y="3474720"/>
             <a:ext cx="9144000" cy="731520"/>
           </a:xfrm>
           <a:prstGeom prst="rect">
@@ -3623,26 +3582,26 @@
             <a:pPr algn="l">
               <a:defRPr sz="2400" b="0">
                 <a:solidFill>
-                  <a:srgbClr val="DCDCDC"/>
-                </a:solidFill>
-                <a:latin typeface="Microsoft YaHei"/>
-              </a:defRPr>
-            </a:pPr>
-            <a:r>
-              <a:t>✓  每个回答自动标注 [[wiki-links]] 引用来源</a:t>
-            </a:r>
-          </a:p>
-        </p:txBody>
-      </p:sp>
-      <p:sp>
-        <p:nvSpPr>
-          <p:cNvPr id="8" name="TextBox 7"/>
+                  <a:srgbClr val="374151"/>
+                </a:solidFill>
+                <a:latin typeface="Microsoft YaHei"/>
+              </a:defRPr>
+            </a:pPr>
+            <a:r>
+              <a:t>✓  检测死链：链接指向不存在的页面</a:t>
+            </a:r>
+          </a:p>
+        </p:txBody>
+      </p:sp>
+      <p:sp>
+        <p:nvSpPr>
+          <p:cNvPr id="7" name="TextBox 6"/>
           <p:cNvSpPr txBox="1"/>
           <p:nvPr/>
         </p:nvSpPr>
         <p:spPr>
           <a:xfrm>
-            <a:off x="1097280" y="5029200"/>
+            <a:off x="1097280" y="4389120"/>
             <a:ext cx="9144000" cy="731520"/>
           </a:xfrm>
           <a:prstGeom prst="rect">
@@ -3659,13 +3618,49 @@
             <a:pPr algn="l">
               <a:defRPr sz="2400" b="0">
                 <a:solidFill>
-                  <a:srgbClr val="DCDCDC"/>
-                </a:solidFill>
-                <a:latin typeface="Microsoft YaHei"/>
-              </a:defRPr>
-            </a:pPr>
-            <a:r>
-              <a:t>✓  相当于你有了一个“读过你所有笔记”的研究助扏</a:t>
+                  <a:srgbClr val="374151"/>
+                </a:solidFill>
+                <a:latin typeface="Microsoft YaHei"/>
+              </a:defRPr>
+            </a:pPr>
+            <a:r>
+              <a:t>✓  检测概念缺口：已有素材但未提炼成概念的领域</a:t>
+            </a:r>
+          </a:p>
+        </p:txBody>
+      </p:sp>
+      <p:sp>
+        <p:nvSpPr>
+          <p:cNvPr id="8" name="TextBox 7"/>
+          <p:cNvSpPr txBox="1"/>
+          <p:nvPr/>
+        </p:nvSpPr>
+        <p:spPr>
+          <a:xfrm>
+            <a:off x="1097280" y="5303520"/>
+            <a:ext cx="9144000" cy="731520"/>
+          </a:xfrm>
+          <a:prstGeom prst="rect">
+            <a:avLst/>
+          </a:prstGeom>
+          <a:noFill/>
+        </p:spPr>
+        <p:txBody>
+          <a:bodyPr wrap="square">
+            <a:spAutoFit/>
+          </a:bodyPr>
+          <a:lstStyle/>
+          <a:p>
+            <a:pPr algn="l">
+              <a:defRPr sz="2400" b="0">
+                <a:solidFill>
+                  <a:srgbClr val="374151"/>
+                </a:solidFill>
+                <a:latin typeface="Microsoft YaHei"/>
+              </a:defRPr>
+            </a:pPr>
+            <a:r>
+              <a:t>✓  一键修复建议，保持知识库持续健康</a:t>
             </a:r>
           </a:p>
         </p:txBody>
@@ -3684,7 +3679,7 @@
     <p:bg>
       <p:bgPr>
         <a:solidFill>
-          <a:srgbClr val="1E1E2E"/>
+          <a:srgbClr val="F8F7FC"/>
         </a:solidFill>
         <a:effectLst/>
       </p:bgPr>
@@ -3711,11 +3706,11 @@
             <a:avLst/>
           </a:prstGeom>
           <a:solidFill>
-            <a:srgbClr val="7058A5"/>
+            <a:srgbClr val="A78BFA"/>
           </a:solidFill>
           <a:ln w="19050">
             <a:solidFill>
-              <a:srgbClr val="A086DA"/>
+              <a:srgbClr val="7C3AED"/>
             </a:solidFill>
           </a:ln>
         </p:spPr>
@@ -3743,7 +3738,7 @@
               </a:spcBef>
               <a:defRPr sz="1300">
                 <a:solidFill>
-                  <a:srgbClr val="F5F5F5"/>
+                  <a:srgbClr val="1F2937"/>
                 </a:solidFill>
                 <a:latin typeface="Microsoft YaHei"/>
               </a:defRPr>
@@ -3779,13 +3774,13 @@
             <a:pPr algn="l">
               <a:defRPr sz="3600" b="1">
                 <a:solidFill>
-                  <a:srgbClr val="F5F5F5"/>
-                </a:solidFill>
-                <a:latin typeface="Microsoft YaHei"/>
-              </a:defRPr>
-            </a:pPr>
-            <a:r>
-              <a:t>自动编译 -- 丢进去就不用管了</a:t>
+                  <a:srgbClr val="1F2937"/>
+                </a:solidFill>
+                <a:latin typeface="Microsoft YaHei"/>
+              </a:defRPr>
+            </a:pPr>
+            <a:r>
+              <a:t>AI 对话 -- 和你的知识库聊天</a:t>
             </a:r>
           </a:p>
         </p:txBody>
@@ -3805,7 +3800,7 @@
             <a:avLst/>
           </a:prstGeom>
           <a:solidFill>
-            <a:srgbClr val="A086DA"/>
+            <a:srgbClr val="7C3AED"/>
           </a:solidFill>
           <a:ln>
             <a:noFill/>
@@ -3858,13 +3853,13 @@
             <a:pPr algn="l">
               <a:defRPr sz="2400" b="0">
                 <a:solidFill>
-                  <a:srgbClr val="DCDCDC"/>
-                </a:solidFill>
-                <a:latin typeface="Microsoft YaHei"/>
-              </a:defRPr>
-            </a:pPr>
-            <a:r>
-              <a:t>✓  监听 raw/ 目录变化，有新素材自动编译，不用手动点</a:t>
+                  <a:srgbClr val="374151"/>
+                </a:solidFill>
+                <a:latin typeface="Microsoft YaHei"/>
+              </a:defRPr>
+            </a:pPr>
+            <a:r>
+              <a:t>✓  针对你的知识库提问，AI 从你编译过的知识中找答案</a:t>
             </a:r>
           </a:p>
         </p:txBody>
@@ -3894,13 +3889,13 @@
             <a:pPr algn="l">
               <a:defRPr sz="2400" b="0">
                 <a:solidFill>
-                  <a:srgbClr val="DCDCDC"/>
-                </a:solidFill>
-                <a:latin typeface="Microsoft YaHei"/>
-              </a:defRPr>
-            </a:pPr>
-            <a:r>
-              <a:t>✓  早上丢一篇文章进去，喝杯咖啡回来，知识库已经更新好了</a:t>
+                  <a:srgbClr val="374151"/>
+                </a:solidFill>
+                <a:latin typeface="Microsoft YaHei"/>
+              </a:defRPr>
+            </a:pPr>
+            <a:r>
+              <a:t>✓  语义搜索：不是关键词匹配，而是理解你的意思</a:t>
             </a:r>
           </a:p>
         </p:txBody>
@@ -3930,13 +3925,49 @@
             <a:pPr algn="l">
               <a:defRPr sz="2400" b="0">
                 <a:solidFill>
-                  <a:srgbClr val="DCDCDC"/>
-                </a:solidFill>
-                <a:latin typeface="Microsoft YaHei"/>
-              </a:defRPr>
-            </a:pPr>
-            <a:r>
-              <a:t>✓  增量编译 + 自动触发，越用越快</a:t>
+                  <a:srgbClr val="374151"/>
+                </a:solidFill>
+                <a:latin typeface="Microsoft YaHei"/>
+              </a:defRPr>
+            </a:pPr>
+            <a:r>
+              <a:t>✓  每个回答自动标注 [[wiki-links]] 引用来源</a:t>
+            </a:r>
+          </a:p>
+        </p:txBody>
+      </p:sp>
+      <p:sp>
+        <p:nvSpPr>
+          <p:cNvPr id="8" name="TextBox 7"/>
+          <p:cNvSpPr txBox="1"/>
+          <p:nvPr/>
+        </p:nvSpPr>
+        <p:spPr>
+          <a:xfrm>
+            <a:off x="1097280" y="5029200"/>
+            <a:ext cx="9144000" cy="731520"/>
+          </a:xfrm>
+          <a:prstGeom prst="rect">
+            <a:avLst/>
+          </a:prstGeom>
+          <a:noFill/>
+        </p:spPr>
+        <p:txBody>
+          <a:bodyPr wrap="square">
+            <a:spAutoFit/>
+          </a:bodyPr>
+          <a:lstStyle/>
+          <a:p>
+            <a:pPr algn="l">
+              <a:defRPr sz="2400" b="0">
+                <a:solidFill>
+                  <a:srgbClr val="374151"/>
+                </a:solidFill>
+                <a:latin typeface="Microsoft YaHei"/>
+              </a:defRPr>
+            </a:pPr>
+            <a:r>
+              <a:t>✓  相当于你有了一个“读过你所有笔记”的研究助扏</a:t>
             </a:r>
           </a:p>
         </p:txBody>
@@ -3955,7 +3986,7 @@
     <p:bg>
       <p:bgPr>
         <a:solidFill>
-          <a:srgbClr val="1E1E2E"/>
+          <a:srgbClr val="F8F7FC"/>
         </a:solidFill>
         <a:effectLst/>
       </p:bgPr>
@@ -3969,59 +4000,25 @@
       <p:grpSpPr/>
       <p:sp>
         <p:nvSpPr>
-          <p:cNvPr id="2" name="TextBox 1"/>
-          <p:cNvSpPr txBox="1"/>
-          <p:nvPr/>
-        </p:nvSpPr>
-        <p:spPr>
-          <a:xfrm>
-            <a:off x="0" y="2286000"/>
-            <a:ext cx="12191695" cy="1097280"/>
-          </a:xfrm>
-          <a:prstGeom prst="rect">
-            <a:avLst/>
-          </a:prstGeom>
-          <a:noFill/>
-        </p:spPr>
-        <p:txBody>
-          <a:bodyPr wrap="square">
-            <a:spAutoFit/>
-          </a:bodyPr>
-          <a:lstStyle/>
-          <a:p>
-            <a:pPr algn="ctr">
-              <a:defRPr sz="4800" b="1">
-                <a:solidFill>
-                  <a:srgbClr val="F5F5F5"/>
-                </a:solidFill>
-                <a:latin typeface="Microsoft YaHei"/>
-              </a:defRPr>
-            </a:pPr>
-            <a:r>
-              <a:t>接下来，直接看效果</a:t>
-            </a:r>
-          </a:p>
-        </p:txBody>
-      </p:sp>
-      <p:sp>
-        <p:nvSpPr>
-          <p:cNvPr id="3" name="Rectangle 2"/>
+          <p:cNvPr id="2" name="Rounded Rectangle 1"/>
           <p:cNvSpPr/>
           <p:nvPr/>
         </p:nvSpPr>
         <p:spPr>
           <a:xfrm>
-            <a:off x="5486400" y="3383280"/>
-            <a:ext cx="1188720" cy="25400"/>
-          </a:xfrm>
-          <a:prstGeom prst="rect">
+            <a:off x="731520" y="457200"/>
+            <a:ext cx="2286000" cy="411480"/>
+          </a:xfrm>
+          <a:prstGeom prst="roundRect">
             <a:avLst/>
           </a:prstGeom>
           <a:solidFill>
-            <a:srgbClr val="A086DA"/>
+            <a:srgbClr val="A78BFA"/>
           </a:solidFill>
-          <a:ln>
-            <a:noFill/>
+          <a:ln w="19050">
+            <a:solidFill>
+              <a:srgbClr val="7C3AED"/>
+            </a:solidFill>
           </a:ln>
         </p:spPr>
         <p:style>
@@ -4039,23 +4036,36 @@
           </a:fontRef>
         </p:style>
         <p:txBody>
-          <a:bodyPr rtlCol="0" anchor="ctr"/>
-          <a:lstStyle/>
-          <a:p>
-            <a:pPr algn="ctr"/>
-          </a:p>
-        </p:txBody>
-      </p:sp>
-      <p:sp>
-        <p:nvSpPr>
-          <p:cNvPr id="4" name="TextBox 3"/>
+          <a:bodyPr rtlCol="0" anchor="ctr" wrap="square"/>
+          <a:lstStyle/>
+          <a:p>
+            <a:pPr algn="ctr">
+              <a:spcBef>
+                <a:spcPts val="0"/>
+              </a:spcBef>
+              <a:defRPr sz="1300">
+                <a:solidFill>
+                  <a:srgbClr val="1F2937"/>
+                </a:solidFill>
+                <a:latin typeface="Microsoft YaHei"/>
+              </a:defRPr>
+            </a:pPr>
+            <a:r>
+              <a:t>Full Version</a:t>
+            </a:r>
+          </a:p>
+        </p:txBody>
+      </p:sp>
+      <p:sp>
+        <p:nvSpPr>
+          <p:cNvPr id="3" name="TextBox 2"/>
           <p:cNvSpPr txBox="1"/>
           <p:nvPr/>
         </p:nvSpPr>
         <p:spPr>
           <a:xfrm>
-            <a:off x="0" y="3840480"/>
-            <a:ext cx="12191695" cy="731520"/>
+            <a:off x="731520" y="1097280"/>
+            <a:ext cx="10058400" cy="731520"/>
           </a:xfrm>
           <a:prstGeom prst="rect">
             <a:avLst/>
@@ -4068,16 +4078,167 @@
           </a:bodyPr>
           <a:lstStyle/>
           <a:p>
-            <a:pPr algn="ctr">
-              <a:defRPr sz="2200" b="0">
-                <a:solidFill>
-                  <a:srgbClr val="9898B0"/>
-                </a:solidFill>
-                <a:latin typeface="Microsoft YaHei"/>
-              </a:defRPr>
-            </a:pPr>
-            <a:r>
-              <a:t>实操演示：安装 -&gt; 配置 -&gt; 编译 -&gt; 浏览 Wiki</a:t>
+            <a:pPr algn="l">
+              <a:defRPr sz="3600" b="1">
+                <a:solidFill>
+                  <a:srgbClr val="1F2937"/>
+                </a:solidFill>
+                <a:latin typeface="Microsoft YaHei"/>
+              </a:defRPr>
+            </a:pPr>
+            <a:r>
+              <a:t>自动编译 -- 丢进去就不用管了</a:t>
+            </a:r>
+          </a:p>
+        </p:txBody>
+      </p:sp>
+      <p:sp>
+        <p:nvSpPr>
+          <p:cNvPr id="4" name="Rectangle 3"/>
+          <p:cNvSpPr/>
+          <p:nvPr/>
+        </p:nvSpPr>
+        <p:spPr>
+          <a:xfrm>
+            <a:off x="731520" y="1828800"/>
+            <a:ext cx="1828800" cy="25400"/>
+          </a:xfrm>
+          <a:prstGeom prst="rect">
+            <a:avLst/>
+          </a:prstGeom>
+          <a:solidFill>
+            <a:srgbClr val="7C3AED"/>
+          </a:solidFill>
+          <a:ln>
+            <a:noFill/>
+          </a:ln>
+        </p:spPr>
+        <p:style>
+          <a:lnRef idx="1">
+            <a:schemeClr val="accent1"/>
+          </a:lnRef>
+          <a:fillRef idx="3">
+            <a:schemeClr val="accent1"/>
+          </a:fillRef>
+          <a:effectRef idx="2">
+            <a:schemeClr val="accent1"/>
+          </a:effectRef>
+          <a:fontRef idx="minor">
+            <a:schemeClr val="lt1"/>
+          </a:fontRef>
+        </p:style>
+        <p:txBody>
+          <a:bodyPr rtlCol="0" anchor="ctr"/>
+          <a:lstStyle/>
+          <a:p>
+            <a:pPr algn="ctr"/>
+          </a:p>
+        </p:txBody>
+      </p:sp>
+      <p:sp>
+        <p:nvSpPr>
+          <p:cNvPr id="5" name="TextBox 4"/>
+          <p:cNvSpPr txBox="1"/>
+          <p:nvPr/>
+        </p:nvSpPr>
+        <p:spPr>
+          <a:xfrm>
+            <a:off x="1097280" y="2286000"/>
+            <a:ext cx="9144000" cy="731520"/>
+          </a:xfrm>
+          <a:prstGeom prst="rect">
+            <a:avLst/>
+          </a:prstGeom>
+          <a:noFill/>
+        </p:spPr>
+        <p:txBody>
+          <a:bodyPr wrap="square">
+            <a:spAutoFit/>
+          </a:bodyPr>
+          <a:lstStyle/>
+          <a:p>
+            <a:pPr algn="l">
+              <a:defRPr sz="2400" b="0">
+                <a:solidFill>
+                  <a:srgbClr val="374151"/>
+                </a:solidFill>
+                <a:latin typeface="Microsoft YaHei"/>
+              </a:defRPr>
+            </a:pPr>
+            <a:r>
+              <a:t>✓  监听 raw/ 目录变化，有新素材自动编译，不用手动点</a:t>
+            </a:r>
+          </a:p>
+        </p:txBody>
+      </p:sp>
+      <p:sp>
+        <p:nvSpPr>
+          <p:cNvPr id="6" name="TextBox 5"/>
+          <p:cNvSpPr txBox="1"/>
+          <p:nvPr/>
+        </p:nvSpPr>
+        <p:spPr>
+          <a:xfrm>
+            <a:off x="1097280" y="3200400"/>
+            <a:ext cx="9144000" cy="731520"/>
+          </a:xfrm>
+          <a:prstGeom prst="rect">
+            <a:avLst/>
+          </a:prstGeom>
+          <a:noFill/>
+        </p:spPr>
+        <p:txBody>
+          <a:bodyPr wrap="square">
+            <a:spAutoFit/>
+          </a:bodyPr>
+          <a:lstStyle/>
+          <a:p>
+            <a:pPr algn="l">
+              <a:defRPr sz="2400" b="0">
+                <a:solidFill>
+                  <a:srgbClr val="374151"/>
+                </a:solidFill>
+                <a:latin typeface="Microsoft YaHei"/>
+              </a:defRPr>
+            </a:pPr>
+            <a:r>
+              <a:t>✓  早上丢一篇文章进去，喝杯咖啡回来，知识库已经更新好了</a:t>
+            </a:r>
+          </a:p>
+        </p:txBody>
+      </p:sp>
+      <p:sp>
+        <p:nvSpPr>
+          <p:cNvPr id="7" name="TextBox 6"/>
+          <p:cNvSpPr txBox="1"/>
+          <p:nvPr/>
+        </p:nvSpPr>
+        <p:spPr>
+          <a:xfrm>
+            <a:off x="1097280" y="4114800"/>
+            <a:ext cx="9144000" cy="731520"/>
+          </a:xfrm>
+          <a:prstGeom prst="rect">
+            <a:avLst/>
+          </a:prstGeom>
+          <a:noFill/>
+        </p:spPr>
+        <p:txBody>
+          <a:bodyPr wrap="square">
+            <a:spAutoFit/>
+          </a:bodyPr>
+          <a:lstStyle/>
+          <a:p>
+            <a:pPr algn="l">
+              <a:defRPr sz="2400" b="0">
+                <a:solidFill>
+                  <a:srgbClr val="374151"/>
+                </a:solidFill>
+                <a:latin typeface="Microsoft YaHei"/>
+              </a:defRPr>
+            </a:pPr>
+            <a:r>
+              <a:t>✓  增量编译 + 自动触发，越用越快</a:t>
             </a:r>
           </a:p>
         </p:txBody>
@@ -4096,7 +4257,7 @@
     <p:bg>
       <p:bgPr>
         <a:solidFill>
-          <a:srgbClr val="1E1E2E"/>
+          <a:srgbClr val="F8F7FC"/>
         </a:solidFill>
         <a:effectLst/>
       </p:bgPr>
@@ -4116,7 +4277,7 @@
         </p:nvSpPr>
         <p:spPr>
           <a:xfrm>
-            <a:off x="0" y="365760"/>
+            <a:off x="0" y="457200"/>
             <a:ext cx="12191695" cy="731520"/>
           </a:xfrm>
           <a:prstGeom prst="rect">
@@ -4133,13 +4294,13 @@
             <a:pPr algn="ctr">
               <a:defRPr sz="3600" b="1">
                 <a:solidFill>
-                  <a:srgbClr val="F5F5F5"/>
-                </a:solidFill>
-                <a:latin typeface="Microsoft YaHei"/>
-              </a:defRPr>
-            </a:pPr>
-            <a:r>
-              <a:t>费用说明</a:t>
+                  <a:srgbClr val="1F2937"/>
+                </a:solidFill>
+                <a:latin typeface="Microsoft YaHei"/>
+              </a:defRPr>
+            </a:pPr>
+            <a:r>
+              <a:t>素材怎么来？配套插件推荐</a:t>
             </a:r>
           </a:p>
         </p:txBody>
@@ -4152,14 +4313,14 @@
         </p:nvSpPr>
         <p:spPr>
           <a:xfrm>
-            <a:off x="5486400" y="1097280"/>
+            <a:off x="5486400" y="1188720"/>
             <a:ext cx="1188720" cy="25400"/>
           </a:xfrm>
           <a:prstGeom prst="rect">
             <a:avLst/>
           </a:prstGeom>
           <a:solidFill>
-            <a:srgbClr val="A086DA"/>
+            <a:srgbClr val="7C3AED"/>
           </a:solidFill>
           <a:ln>
             <a:noFill/>
@@ -4189,24 +4350,60 @@
       </p:sp>
       <p:sp>
         <p:nvSpPr>
-          <p:cNvPr id="4" name="Rounded Rectangle 3"/>
+          <p:cNvPr id="4" name="TextBox 3"/>
+          <p:cNvSpPr txBox="1"/>
+          <p:nvPr/>
+        </p:nvSpPr>
+        <p:spPr>
+          <a:xfrm>
+            <a:off x="914400" y="1554480"/>
+            <a:ext cx="10058400" cy="548640"/>
+          </a:xfrm>
+          <a:prstGeom prst="rect">
+            <a:avLst/>
+          </a:prstGeom>
+          <a:noFill/>
+        </p:spPr>
+        <p:txBody>
+          <a:bodyPr wrap="square">
+            <a:spAutoFit/>
+          </a:bodyPr>
+          <a:lstStyle/>
+          <a:p>
+            <a:pPr algn="ctr">
+              <a:defRPr sz="1800" b="0">
+                <a:solidFill>
+                  <a:srgbClr val="6B7280"/>
+                </a:solidFill>
+                <a:latin typeface="Microsoft YaHei"/>
+              </a:defRPr>
+            </a:pPr>
+            <a:r>
+              <a:t>这些 Obsidian 插件帮你把素材自动收集到 raw/ 目录，再用 Second Brain 编译</a:t>
+            </a:r>
+          </a:p>
+        </p:txBody>
+      </p:sp>
+      <p:sp>
+        <p:nvSpPr>
+          <p:cNvPr id="5" name="Rounded Rectangle 4"/>
           <p:cNvSpPr/>
           <p:nvPr/>
         </p:nvSpPr>
         <p:spPr>
           <a:xfrm>
-            <a:off x="1371600" y="1371600"/>
-            <a:ext cx="4114800" cy="4846320"/>
+            <a:off x="1645920" y="2377440"/>
+            <a:ext cx="2926080" cy="2926080"/>
           </a:xfrm>
           <a:prstGeom prst="roundRect">
             <a:avLst/>
           </a:prstGeom>
           <a:solidFill>
-            <a:srgbClr val="2A273B"/>
+            <a:srgbClr val="EFEDF6"/>
           </a:solidFill>
           <a:ln w="19050">
             <a:solidFill>
-              <a:srgbClr val="3C3852"/>
+              <a:srgbClr val="DDDBE5"/>
             </a:solidFill>
           </a:ln>
         </p:spPr>
@@ -4234,313 +4431,23 @@
       </p:sp>
       <p:sp>
         <p:nvSpPr>
-          <p:cNvPr id="5" name="TextBox 4"/>
-          <p:cNvSpPr txBox="1"/>
-          <p:nvPr/>
-        </p:nvSpPr>
-        <p:spPr>
-          <a:xfrm>
-            <a:off x="1371600" y="1554480"/>
-            <a:ext cx="4114800" cy="457200"/>
-          </a:xfrm>
-          <a:prstGeom prst="rect">
-            <a:avLst/>
-          </a:prstGeom>
-          <a:noFill/>
-        </p:spPr>
-        <p:txBody>
-          <a:bodyPr wrap="square">
-            <a:spAutoFit/>
-          </a:bodyPr>
-          <a:lstStyle/>
-          <a:p>
-            <a:pPr algn="ctr">
-              <a:defRPr sz="2800" b="1">
-                <a:solidFill>
-                  <a:srgbClr val="9898B0"/>
-                </a:solidFill>
-                <a:latin typeface="Microsoft YaHei"/>
-              </a:defRPr>
-            </a:pPr>
-            <a:r>
-              <a:t>内测期间</a:t>
-            </a:r>
-          </a:p>
-        </p:txBody>
-      </p:sp>
-      <p:sp>
-        <p:nvSpPr>
-          <p:cNvPr id="6" name="TextBox 5"/>
-          <p:cNvSpPr txBox="1"/>
-          <p:nvPr/>
-        </p:nvSpPr>
-        <p:spPr>
-          <a:xfrm>
-            <a:off x="1371600" y="2103120"/>
-            <a:ext cx="4114800" cy="731520"/>
-          </a:xfrm>
-          <a:prstGeom prst="rect">
-            <a:avLst/>
-          </a:prstGeom>
-          <a:noFill/>
-        </p:spPr>
-        <p:txBody>
-          <a:bodyPr wrap="square">
-            <a:spAutoFit/>
-          </a:bodyPr>
-          <a:lstStyle/>
-          <a:p>
-            <a:pPr algn="ctr">
-              <a:defRPr sz="3600" b="1">
-                <a:solidFill>
-                  <a:srgbClr val="F5F5F5"/>
-                </a:solidFill>
-                <a:latin typeface="Microsoft YaHei"/>
-              </a:defRPr>
-            </a:pPr>
-            <a:r>
-              <a:t>免费体验全部功能</a:t>
-            </a:r>
-          </a:p>
-        </p:txBody>
-      </p:sp>
-      <p:sp>
-        <p:nvSpPr>
-          <p:cNvPr id="7" name="TextBox 6"/>
-          <p:cNvSpPr txBox="1"/>
-          <p:nvPr/>
-        </p:nvSpPr>
-        <p:spPr>
-          <a:xfrm>
-            <a:off x="1371600" y="2834640"/>
-            <a:ext cx="4114800" cy="457200"/>
-          </a:xfrm>
-          <a:prstGeom prst="rect">
-            <a:avLst/>
-          </a:prstGeom>
-          <a:noFill/>
-        </p:spPr>
-        <p:txBody>
-          <a:bodyPr wrap="square">
-            <a:spAutoFit/>
-          </a:bodyPr>
-          <a:lstStyle/>
-          <a:p>
-            <a:pPr algn="ctr">
-              <a:defRPr sz="1600" b="0">
-                <a:solidFill>
-                  <a:srgbClr val="686880"/>
-                </a:solidFill>
-                <a:latin typeface="Microsoft YaHei"/>
-              </a:defRPr>
-            </a:pPr>
-            <a:r>
-              <a:t>首次编译后 14 天全功能体验</a:t>
-            </a:r>
-          </a:p>
-        </p:txBody>
-      </p:sp>
-      <p:sp>
-        <p:nvSpPr>
-          <p:cNvPr id="8" name="TextBox 7"/>
-          <p:cNvSpPr txBox="1"/>
-          <p:nvPr/>
-        </p:nvSpPr>
-        <p:spPr>
-          <a:xfrm>
-            <a:off x="1828800" y="3474720"/>
-            <a:ext cx="3200400" cy="457200"/>
-          </a:xfrm>
-          <a:prstGeom prst="rect">
-            <a:avLst/>
-          </a:prstGeom>
-          <a:noFill/>
-        </p:spPr>
-        <p:txBody>
-          <a:bodyPr wrap="square">
-            <a:spAutoFit/>
-          </a:bodyPr>
-          <a:lstStyle/>
-          <a:p>
-            <a:pPr algn="l">
-              <a:defRPr sz="1500" b="0">
-                <a:solidFill>
-                  <a:srgbClr val="9898B0"/>
-                </a:solidFill>
-                <a:latin typeface="Microsoft YaHei"/>
-              </a:defRPr>
-            </a:pPr>
-            <a:r>
-              <a:t>✓  AI 编译（全量 / 单文件）</a:t>
-            </a:r>
-          </a:p>
-        </p:txBody>
-      </p:sp>
-      <p:sp>
-        <p:nvSpPr>
-          <p:cNvPr id="9" name="TextBox 8"/>
-          <p:cNvSpPr txBox="1"/>
-          <p:nvPr/>
-        </p:nvSpPr>
-        <p:spPr>
-          <a:xfrm>
-            <a:off x="1828800" y="3950208"/>
-            <a:ext cx="3200400" cy="457200"/>
-          </a:xfrm>
-          <a:prstGeom prst="rect">
-            <a:avLst/>
-          </a:prstGeom>
-          <a:noFill/>
-        </p:spPr>
-        <p:txBody>
-          <a:bodyPr wrap="square">
-            <a:spAutoFit/>
-          </a:bodyPr>
-          <a:lstStyle/>
-          <a:p>
-            <a:pPr algn="l">
-              <a:defRPr sz="1500" b="0">
-                <a:solidFill>
-                  <a:srgbClr val="9898B0"/>
-                </a:solidFill>
-                <a:latin typeface="Microsoft YaHei"/>
-              </a:defRPr>
-            </a:pPr>
-            <a:r>
-              <a:t>✓  Wiki 浏览器 + AI 对话</a:t>
-            </a:r>
-          </a:p>
-        </p:txBody>
-      </p:sp>
-      <p:sp>
-        <p:nvSpPr>
-          <p:cNvPr id="10" name="TextBox 9"/>
-          <p:cNvSpPr txBox="1"/>
-          <p:nvPr/>
-        </p:nvSpPr>
-        <p:spPr>
-          <a:xfrm>
-            <a:off x="1828800" y="4425696"/>
-            <a:ext cx="3200400" cy="457200"/>
-          </a:xfrm>
-          <a:prstGeom prst="rect">
-            <a:avLst/>
-          </a:prstGeom>
-          <a:noFill/>
-        </p:spPr>
-        <p:txBody>
-          <a:bodyPr wrap="square">
-            <a:spAutoFit/>
-          </a:bodyPr>
-          <a:lstStyle/>
-          <a:p>
-            <a:pPr algn="l">
-              <a:defRPr sz="1500" b="0">
-                <a:solidFill>
-                  <a:srgbClr val="9898B0"/>
-                </a:solidFill>
-                <a:latin typeface="Microsoft YaHei"/>
-              </a:defRPr>
-            </a:pPr>
-            <a:r>
-              <a:t>✓  自动编译 + 语义搜索</a:t>
-            </a:r>
-          </a:p>
-        </p:txBody>
-      </p:sp>
-      <p:sp>
-        <p:nvSpPr>
-          <p:cNvPr id="11" name="TextBox 10"/>
-          <p:cNvSpPr txBox="1"/>
-          <p:nvPr/>
-        </p:nvSpPr>
-        <p:spPr>
-          <a:xfrm>
-            <a:off x="1828800" y="4901184"/>
-            <a:ext cx="3200400" cy="457200"/>
-          </a:xfrm>
-          <a:prstGeom prst="rect">
-            <a:avLst/>
-          </a:prstGeom>
-          <a:noFill/>
-        </p:spPr>
-        <p:txBody>
-          <a:bodyPr wrap="square">
-            <a:spAutoFit/>
-          </a:bodyPr>
-          <a:lstStyle/>
-          <a:p>
-            <a:pPr algn="l">
-              <a:defRPr sz="1500" b="0">
-                <a:solidFill>
-                  <a:srgbClr val="9898B0"/>
-                </a:solidFill>
-                <a:latin typeface="Microsoft YaHei"/>
-              </a:defRPr>
-            </a:pPr>
-            <a:r>
-              <a:t>✓  多 LLM 支持 + 多语言</a:t>
-            </a:r>
-          </a:p>
-        </p:txBody>
-      </p:sp>
-      <p:sp>
-        <p:nvSpPr>
-          <p:cNvPr id="12" name="TextBox 11"/>
-          <p:cNvSpPr txBox="1"/>
-          <p:nvPr/>
-        </p:nvSpPr>
-        <p:spPr>
-          <a:xfrm>
-            <a:off x="1828800" y="5376672"/>
-            <a:ext cx="3200400" cy="457200"/>
-          </a:xfrm>
-          <a:prstGeom prst="rect">
-            <a:avLst/>
-          </a:prstGeom>
-          <a:noFill/>
-        </p:spPr>
-        <p:txBody>
-          <a:bodyPr wrap="square">
-            <a:spAutoFit/>
-          </a:bodyPr>
-          <a:lstStyle/>
-          <a:p>
-            <a:pPr algn="l">
-              <a:defRPr sz="1500" b="0">
-                <a:solidFill>
-                  <a:srgbClr val="9898B0"/>
-                </a:solidFill>
-                <a:latin typeface="Microsoft YaHei"/>
-              </a:defRPr>
-            </a:pPr>
-            <a:r>
-              <a:t>✓  知识健康度检查</a:t>
-            </a:r>
-          </a:p>
-        </p:txBody>
-      </p:sp>
-      <p:sp>
-        <p:nvSpPr>
-          <p:cNvPr id="13" name="Rounded Rectangle 12"/>
+          <p:cNvPr id="6" name="Oval 5"/>
           <p:cNvSpPr/>
           <p:nvPr/>
         </p:nvSpPr>
         <p:spPr>
           <a:xfrm>
-            <a:off x="6400800" y="1371600"/>
-            <a:ext cx="4389120" cy="4846320"/>
-          </a:xfrm>
-          <a:prstGeom prst="roundRect">
+            <a:off x="2697480" y="2651760"/>
+            <a:ext cx="731520" cy="731520"/>
+          </a:xfrm>
+          <a:prstGeom prst="ellipse">
             <a:avLst/>
           </a:prstGeom>
           <a:solidFill>
-            <a:srgbClr val="2A2445"/>
+            <a:srgbClr val="A78BFA"/>
           </a:solidFill>
-          <a:ln w="19050">
-            <a:solidFill>
-              <a:srgbClr val="A086DA"/>
-            </a:solidFill>
+          <a:ln>
+            <a:noFill/>
           </a:ln>
         </p:spPr>
         <p:style>
@@ -4558,32 +4465,119 @@
           </a:fontRef>
         </p:style>
         <p:txBody>
-          <a:bodyPr rtlCol="0" anchor="ctr"/>
-          <a:lstStyle/>
-          <a:p>
-            <a:pPr algn="ctr"/>
-          </a:p>
-        </p:txBody>
-      </p:sp>
-      <p:sp>
-        <p:nvSpPr>
-          <p:cNvPr id="14" name="Rounded Rectangle 13"/>
+          <a:bodyPr rtlCol="0" anchor="ctr" wrap="square"/>
+          <a:lstStyle/>
+          <a:p>
+            <a:pPr algn="ctr">
+              <a:spcBef>
+                <a:spcPts val="0"/>
+              </a:spcBef>
+              <a:defRPr sz="2000">
+                <a:solidFill>
+                  <a:srgbClr val="1F2937"/>
+                </a:solidFill>
+                <a:latin typeface="Microsoft YaHei"/>
+              </a:defRPr>
+            </a:pPr>
+            <a:r>
+              <a:t>W</a:t>
+            </a:r>
+          </a:p>
+        </p:txBody>
+      </p:sp>
+      <p:sp>
+        <p:nvSpPr>
+          <p:cNvPr id="7" name="TextBox 6"/>
+          <p:cNvSpPr txBox="1"/>
+          <p:nvPr/>
+        </p:nvSpPr>
+        <p:spPr>
+          <a:xfrm>
+            <a:off x="1645920" y="3566160"/>
+            <a:ext cx="2926080" cy="457200"/>
+          </a:xfrm>
+          <a:prstGeom prst="rect">
+            <a:avLst/>
+          </a:prstGeom>
+          <a:noFill/>
+        </p:spPr>
+        <p:txBody>
+          <a:bodyPr wrap="square">
+            <a:spAutoFit/>
+          </a:bodyPr>
+          <a:lstStyle/>
+          <a:p>
+            <a:pPr algn="ctr">
+              <a:defRPr sz="2000" b="1">
+                <a:solidFill>
+                  <a:srgbClr val="1F2937"/>
+                </a:solidFill>
+                <a:latin typeface="Microsoft YaHei"/>
+              </a:defRPr>
+            </a:pPr>
+            <a:r>
+              <a:t>Obsidian Web Clipper</a:t>
+            </a:r>
+          </a:p>
+        </p:txBody>
+      </p:sp>
+      <p:sp>
+        <p:nvSpPr>
+          <p:cNvPr id="8" name="TextBox 7"/>
+          <p:cNvSpPr txBox="1"/>
+          <p:nvPr/>
+        </p:nvSpPr>
+        <p:spPr>
+          <a:xfrm>
+            <a:off x="1828800" y="4114800"/>
+            <a:ext cx="2560320" cy="1097280"/>
+          </a:xfrm>
+          <a:prstGeom prst="rect">
+            <a:avLst/>
+          </a:prstGeom>
+          <a:noFill/>
+        </p:spPr>
+        <p:txBody>
+          <a:bodyPr wrap="square">
+            <a:spAutoFit/>
+          </a:bodyPr>
+          <a:lstStyle/>
+          <a:p>
+            <a:pPr algn="ctr">
+              <a:defRPr sz="1600" b="0">
+                <a:solidFill>
+                  <a:srgbClr val="6B7280"/>
+                </a:solidFill>
+                <a:latin typeface="Microsoft YaHei"/>
+              </a:defRPr>
+            </a:pPr>
+            <a:r>
+              <a:t>浏览器插件，一键剪藏网页文章到 raw/</a:t>
+            </a:r>
+          </a:p>
+        </p:txBody>
+      </p:sp>
+      <p:sp>
+        <p:nvSpPr>
+          <p:cNvPr id="9" name="Rounded Rectangle 8"/>
           <p:cNvSpPr/>
           <p:nvPr/>
         </p:nvSpPr>
         <p:spPr>
           <a:xfrm>
-            <a:off x="6675120" y="1188720"/>
-            <a:ext cx="1645920" cy="365760"/>
+            <a:off x="5120640" y="2377440"/>
+            <a:ext cx="2926080" cy="2926080"/>
           </a:xfrm>
           <a:prstGeom prst="roundRect">
             <a:avLst/>
           </a:prstGeom>
           <a:solidFill>
-            <a:srgbClr val="A086DA"/>
+            <a:srgbClr val="EFEDF6"/>
           </a:solidFill>
-          <a:ln>
-            <a:noFill/>
+          <a:ln w="19050">
+            <a:solidFill>
+              <a:srgbClr val="DDDBE5"/>
+            </a:solidFill>
           </a:ln>
         </p:spPr>
         <p:style>
@@ -4601,6 +4595,49 @@
           </a:fontRef>
         </p:style>
         <p:txBody>
+          <a:bodyPr rtlCol="0" anchor="ctr"/>
+          <a:lstStyle/>
+          <a:p>
+            <a:pPr algn="ctr"/>
+          </a:p>
+        </p:txBody>
+      </p:sp>
+      <p:sp>
+        <p:nvSpPr>
+          <p:cNvPr id="10" name="Oval 9"/>
+          <p:cNvSpPr/>
+          <p:nvPr/>
+        </p:nvSpPr>
+        <p:spPr>
+          <a:xfrm>
+            <a:off x="6172200" y="2651760"/>
+            <a:ext cx="731520" cy="731520"/>
+          </a:xfrm>
+          <a:prstGeom prst="ellipse">
+            <a:avLst/>
+          </a:prstGeom>
+          <a:solidFill>
+            <a:srgbClr val="A78BFA"/>
+          </a:solidFill>
+          <a:ln>
+            <a:noFill/>
+          </a:ln>
+        </p:spPr>
+        <p:style>
+          <a:lnRef idx="1">
+            <a:schemeClr val="accent1"/>
+          </a:lnRef>
+          <a:fillRef idx="3">
+            <a:schemeClr val="accent1"/>
+          </a:fillRef>
+          <a:effectRef idx="2">
+            <a:schemeClr val="accent1"/>
+          </a:effectRef>
+          <a:fontRef idx="minor">
+            <a:schemeClr val="lt1"/>
+          </a:fontRef>
+        </p:style>
+        <p:txBody>
           <a:bodyPr rtlCol="0" anchor="ctr" wrap="square"/>
           <a:lstStyle/>
           <a:p>
@@ -4608,29 +4645,29 @@
               <a:spcBef>
                 <a:spcPts val="0"/>
               </a:spcBef>
-              <a:defRPr sz="1200">
-                <a:solidFill>
-                  <a:srgbClr val="F5F5F5"/>
-                </a:solidFill>
-                <a:latin typeface="Microsoft YaHei"/>
-              </a:defRPr>
-            </a:pPr>
-            <a:r>
-              <a:t>一次买断</a:t>
-            </a:r>
-          </a:p>
-        </p:txBody>
-      </p:sp>
-      <p:sp>
-        <p:nvSpPr>
-          <p:cNvPr id="15" name="TextBox 14"/>
+              <a:defRPr sz="2000">
+                <a:solidFill>
+                  <a:srgbClr val="1F2937"/>
+                </a:solidFill>
+                <a:latin typeface="Microsoft YaHei"/>
+              </a:defRPr>
+            </a:pPr>
+            <a:r>
+              <a:t>小</a:t>
+            </a:r>
+          </a:p>
+        </p:txBody>
+      </p:sp>
+      <p:sp>
+        <p:nvSpPr>
+          <p:cNvPr id="11" name="TextBox 10"/>
           <p:cNvSpPr txBox="1"/>
           <p:nvPr/>
         </p:nvSpPr>
         <p:spPr>
           <a:xfrm>
-            <a:off x="6400800" y="1645920"/>
-            <a:ext cx="4389120" cy="457200"/>
+            <a:off x="5120640" y="3566160"/>
+            <a:ext cx="2926080" cy="457200"/>
           </a:xfrm>
           <a:prstGeom prst="rect">
             <a:avLst/>
@@ -4644,29 +4681,29 @@
           <a:lstStyle/>
           <a:p>
             <a:pPr algn="ctr">
-              <a:defRPr sz="2800" b="1">
-                <a:solidFill>
-                  <a:srgbClr val="BB99FF"/>
-                </a:solidFill>
-                <a:latin typeface="Microsoft YaHei"/>
-              </a:defRPr>
-            </a:pPr>
-            <a:r>
-              <a:t>全功能版</a:t>
-            </a:r>
-          </a:p>
-        </p:txBody>
-      </p:sp>
-      <p:sp>
-        <p:nvSpPr>
-          <p:cNvPr id="16" name="TextBox 15"/>
+              <a:defRPr sz="2000" b="1">
+                <a:solidFill>
+                  <a:srgbClr val="1F2937"/>
+                </a:solidFill>
+                <a:latin typeface="Microsoft YaHei"/>
+              </a:defRPr>
+            </a:pPr>
+            <a:r>
+              <a:t>小红书 Importer</a:t>
+            </a:r>
+          </a:p>
+        </p:txBody>
+      </p:sp>
+      <p:sp>
+        <p:nvSpPr>
+          <p:cNvPr id="12" name="TextBox 11"/>
           <p:cNvSpPr txBox="1"/>
           <p:nvPr/>
         </p:nvSpPr>
         <p:spPr>
           <a:xfrm>
-            <a:off x="6400800" y="2194560"/>
-            <a:ext cx="4389120" cy="731520"/>
+            <a:off x="5303520" y="4114800"/>
+            <a:ext cx="2560320" cy="1097280"/>
           </a:xfrm>
           <a:prstGeom prst="rect">
             <a:avLst/>
@@ -4680,29 +4717,130 @@
           <a:lstStyle/>
           <a:p>
             <a:pPr algn="ctr">
-              <a:defRPr sz="5200" b="1">
-                <a:solidFill>
-                  <a:srgbClr val="F5F5F5"/>
-                </a:solidFill>
-                <a:latin typeface="Microsoft YaHei"/>
-              </a:defRPr>
-            </a:pPr>
-            <a:r>
-              <a:t>¥ 30</a:t>
-            </a:r>
-          </a:p>
-        </p:txBody>
-      </p:sp>
-      <p:sp>
-        <p:nvSpPr>
-          <p:cNvPr id="17" name="TextBox 16"/>
+              <a:defRPr sz="1600" b="0">
+                <a:solidFill>
+                  <a:srgbClr val="6B7280"/>
+                </a:solidFill>
+                <a:latin typeface="Microsoft YaHei"/>
+              </a:defRPr>
+            </a:pPr>
+            <a:r>
+              <a:t>导入小红书收藏笔记到 Obsidian</a:t>
+            </a:r>
+          </a:p>
+        </p:txBody>
+      </p:sp>
+      <p:sp>
+        <p:nvSpPr>
+          <p:cNvPr id="13" name="Rounded Rectangle 12"/>
+          <p:cNvSpPr/>
+          <p:nvPr/>
+        </p:nvSpPr>
+        <p:spPr>
+          <a:xfrm>
+            <a:off x="8595360" y="2377440"/>
+            <a:ext cx="2926080" cy="2926080"/>
+          </a:xfrm>
+          <a:prstGeom prst="roundRect">
+            <a:avLst/>
+          </a:prstGeom>
+          <a:solidFill>
+            <a:srgbClr val="EFEDF6"/>
+          </a:solidFill>
+          <a:ln w="19050">
+            <a:solidFill>
+              <a:srgbClr val="DDDBE5"/>
+            </a:solidFill>
+          </a:ln>
+        </p:spPr>
+        <p:style>
+          <a:lnRef idx="1">
+            <a:schemeClr val="accent1"/>
+          </a:lnRef>
+          <a:fillRef idx="3">
+            <a:schemeClr val="accent1"/>
+          </a:fillRef>
+          <a:effectRef idx="2">
+            <a:schemeClr val="accent1"/>
+          </a:effectRef>
+          <a:fontRef idx="minor">
+            <a:schemeClr val="lt1"/>
+          </a:fontRef>
+        </p:style>
+        <p:txBody>
+          <a:bodyPr rtlCol="0" anchor="ctr"/>
+          <a:lstStyle/>
+          <a:p>
+            <a:pPr algn="ctr"/>
+          </a:p>
+        </p:txBody>
+      </p:sp>
+      <p:sp>
+        <p:nvSpPr>
+          <p:cNvPr id="14" name="Oval 13"/>
+          <p:cNvSpPr/>
+          <p:nvPr/>
+        </p:nvSpPr>
+        <p:spPr>
+          <a:xfrm>
+            <a:off x="9646920" y="2651760"/>
+            <a:ext cx="731520" cy="731520"/>
+          </a:xfrm>
+          <a:prstGeom prst="ellipse">
+            <a:avLst/>
+          </a:prstGeom>
+          <a:solidFill>
+            <a:srgbClr val="A78BFA"/>
+          </a:solidFill>
+          <a:ln>
+            <a:noFill/>
+          </a:ln>
+        </p:spPr>
+        <p:style>
+          <a:lnRef idx="1">
+            <a:schemeClr val="accent1"/>
+          </a:lnRef>
+          <a:fillRef idx="3">
+            <a:schemeClr val="accent1"/>
+          </a:fillRef>
+          <a:effectRef idx="2">
+            <a:schemeClr val="accent1"/>
+          </a:effectRef>
+          <a:fontRef idx="minor">
+            <a:schemeClr val="lt1"/>
+          </a:fontRef>
+        </p:style>
+        <p:txBody>
+          <a:bodyPr rtlCol="0" anchor="ctr" wrap="square"/>
+          <a:lstStyle/>
+          <a:p>
+            <a:pPr algn="ctr">
+              <a:spcBef>
+                <a:spcPts val="0"/>
+              </a:spcBef>
+              <a:defRPr sz="2000">
+                <a:solidFill>
+                  <a:srgbClr val="1F2937"/>
+                </a:solidFill>
+                <a:latin typeface="Microsoft YaHei"/>
+              </a:defRPr>
+            </a:pPr>
+            <a:r>
+              <a:t>P</a:t>
+            </a:r>
+          </a:p>
+        </p:txBody>
+      </p:sp>
+      <p:sp>
+        <p:nvSpPr>
+          <p:cNvPr id="15" name="TextBox 14"/>
           <p:cNvSpPr txBox="1"/>
           <p:nvPr/>
         </p:nvSpPr>
         <p:spPr>
           <a:xfrm>
-            <a:off x="6858000" y="3108960"/>
-            <a:ext cx="3474720" cy="457200"/>
+            <a:off x="8595360" y="3566160"/>
+            <a:ext cx="2926080" cy="457200"/>
           </a:xfrm>
           <a:prstGeom prst="rect">
             <a:avLst/>
@@ -4715,30 +4853,30 @@
           </a:bodyPr>
           <a:lstStyle/>
           <a:p>
-            <a:pPr algn="l">
-              <a:defRPr sz="1500" b="0">
-                <a:solidFill>
-                  <a:srgbClr val="DCDCDC"/>
-                </a:solidFill>
-                <a:latin typeface="Microsoft YaHei"/>
-              </a:defRPr>
-            </a:pPr>
-            <a:r>
-              <a:t>✓  试用期全部功能，无限制</a:t>
-            </a:r>
-          </a:p>
-        </p:txBody>
-      </p:sp>
-      <p:sp>
-        <p:nvSpPr>
-          <p:cNvPr id="18" name="TextBox 17"/>
+            <a:pPr algn="ctr">
+              <a:defRPr sz="2000" b="1">
+                <a:solidFill>
+                  <a:srgbClr val="1F2937"/>
+                </a:solidFill>
+                <a:latin typeface="Microsoft YaHei"/>
+              </a:defRPr>
+            </a:pPr>
+            <a:r>
+              <a:t>Podwise</a:t>
+            </a:r>
+          </a:p>
+        </p:txBody>
+      </p:sp>
+      <p:sp>
+        <p:nvSpPr>
+          <p:cNvPr id="16" name="TextBox 15"/>
           <p:cNvSpPr txBox="1"/>
           <p:nvPr/>
         </p:nvSpPr>
         <p:spPr>
           <a:xfrm>
-            <a:off x="6858000" y="3584448"/>
-            <a:ext cx="3474720" cy="457200"/>
+            <a:off x="8778240" y="4114800"/>
+            <a:ext cx="2560320" cy="1097280"/>
           </a:xfrm>
           <a:prstGeom prst="rect">
             <a:avLst/>
@@ -4751,30 +4889,30 @@
           </a:bodyPr>
           <a:lstStyle/>
           <a:p>
-            <a:pPr algn="l">
-              <a:defRPr sz="1500" b="0">
-                <a:solidFill>
-                  <a:srgbClr val="DCDCDC"/>
-                </a:solidFill>
-                <a:latin typeface="Microsoft YaHei"/>
-              </a:defRPr>
-            </a:pPr>
-            <a:r>
-              <a:t>✓  自动编译 -- 新素材自动处理</a:t>
-            </a:r>
-          </a:p>
-        </p:txBody>
-      </p:sp>
-      <p:sp>
-        <p:nvSpPr>
-          <p:cNvPr id="19" name="TextBox 18"/>
+            <a:pPr algn="ctr">
+              <a:defRPr sz="1600" b="0">
+                <a:solidFill>
+                  <a:srgbClr val="6B7280"/>
+                </a:solidFill>
+                <a:latin typeface="Microsoft YaHei"/>
+              </a:defRPr>
+            </a:pPr>
+            <a:r>
+              <a:t>自动整理播客内容，生成结构化笔记</a:t>
+            </a:r>
+          </a:p>
+        </p:txBody>
+      </p:sp>
+      <p:sp>
+        <p:nvSpPr>
+          <p:cNvPr id="17" name="TextBox 16"/>
           <p:cNvSpPr txBox="1"/>
           <p:nvPr/>
         </p:nvSpPr>
         <p:spPr>
           <a:xfrm>
-            <a:off x="6858000" y="4059936"/>
-            <a:ext cx="3474720" cy="457200"/>
+            <a:off x="0" y="5669280"/>
+            <a:ext cx="12191695" cy="548640"/>
           </a:xfrm>
           <a:prstGeom prst="rect">
             <a:avLst/>
@@ -4787,124 +4925,16 @@
           </a:bodyPr>
           <a:lstStyle/>
           <a:p>
-            <a:pPr algn="l">
-              <a:defRPr sz="1500" b="0">
-                <a:solidFill>
-                  <a:srgbClr val="DCDCDC"/>
-                </a:solidFill>
-                <a:latin typeface="Microsoft YaHei"/>
-              </a:defRPr>
-            </a:pPr>
-            <a:r>
-              <a:t>✓  AI 对话 -- 回答引用 [[wiki-links]]</a:t>
-            </a:r>
-          </a:p>
-        </p:txBody>
-      </p:sp>
-      <p:sp>
-        <p:nvSpPr>
-          <p:cNvPr id="20" name="TextBox 19"/>
-          <p:cNvSpPr txBox="1"/>
-          <p:nvPr/>
-        </p:nvSpPr>
-        <p:spPr>
-          <a:xfrm>
-            <a:off x="6858000" y="4535424"/>
-            <a:ext cx="3474720" cy="457200"/>
-          </a:xfrm>
-          <a:prstGeom prst="rect">
-            <a:avLst/>
-          </a:prstGeom>
-          <a:noFill/>
-        </p:spPr>
-        <p:txBody>
-          <a:bodyPr wrap="square">
-            <a:spAutoFit/>
-          </a:bodyPr>
-          <a:lstStyle/>
-          <a:p>
-            <a:pPr algn="l">
-              <a:defRPr sz="1500" b="0">
-                <a:solidFill>
-                  <a:srgbClr val="DCDCDC"/>
-                </a:solidFill>
-                <a:latin typeface="Microsoft YaHei"/>
-              </a:defRPr>
-            </a:pPr>
-            <a:r>
-              <a:t>✓  一键切换 LLM 后端</a:t>
-            </a:r>
-          </a:p>
-        </p:txBody>
-      </p:sp>
-      <p:sp>
-        <p:nvSpPr>
-          <p:cNvPr id="21" name="TextBox 20"/>
-          <p:cNvSpPr txBox="1"/>
-          <p:nvPr/>
-        </p:nvSpPr>
-        <p:spPr>
-          <a:xfrm>
-            <a:off x="6858000" y="5010912"/>
-            <a:ext cx="3474720" cy="457200"/>
-          </a:xfrm>
-          <a:prstGeom prst="rect">
-            <a:avLst/>
-          </a:prstGeom>
-          <a:noFill/>
-        </p:spPr>
-        <p:txBody>
-          <a:bodyPr wrap="square">
-            <a:spAutoFit/>
-          </a:bodyPr>
-          <a:lstStyle/>
-          <a:p>
-            <a:pPr algn="l">
-              <a:defRPr sz="1500" b="0">
-                <a:solidFill>
-                  <a:srgbClr val="DCDCDC"/>
-                </a:solidFill>
-                <a:latin typeface="Microsoft YaHei"/>
-              </a:defRPr>
-            </a:pPr>
-            <a:r>
-              <a:t>✓  知识健康度检查</a:t>
-            </a:r>
-          </a:p>
-        </p:txBody>
-      </p:sp>
-      <p:sp>
-        <p:nvSpPr>
-          <p:cNvPr id="22" name="TextBox 21"/>
-          <p:cNvSpPr txBox="1"/>
-          <p:nvPr/>
-        </p:nvSpPr>
-        <p:spPr>
-          <a:xfrm>
-            <a:off x="6858000" y="5486400"/>
-            <a:ext cx="3474720" cy="457200"/>
-          </a:xfrm>
-          <a:prstGeom prst="rect">
-            <a:avLst/>
-          </a:prstGeom>
-          <a:noFill/>
-        </p:spPr>
-        <p:txBody>
-          <a:bodyPr wrap="square">
-            <a:spAutoFit/>
-          </a:bodyPr>
-          <a:lstStyle/>
-          <a:p>
-            <a:pPr algn="l">
-              <a:defRPr sz="1500" b="0">
-                <a:solidFill>
-                  <a:srgbClr val="DCDCDC"/>
-                </a:solidFill>
-                <a:latin typeface="Microsoft YaHei"/>
-              </a:defRPr>
-            </a:pPr>
-            <a:r>
-              <a:t>✓  不搞订阅，买一次用一辈子</a:t>
+            <a:pPr algn="ctr">
+              <a:defRPr sz="2000" b="1">
+                <a:solidFill>
+                  <a:srgbClr val="059669"/>
+                </a:solidFill>
+                <a:latin typeface="Microsoft YaHei"/>
+              </a:defRPr>
+            </a:pPr>
+            <a:r>
+              <a:t>素材收集 + Second Brain 编译 = 从收集到整理全自动</a:t>
             </a:r>
           </a:p>
         </p:txBody>
@@ -4923,7 +4953,7 @@
     <p:bg>
       <p:bgPr>
         <a:solidFill>
-          <a:srgbClr val="1E1E2E"/>
+          <a:srgbClr val="F8F7FC"/>
         </a:solidFill>
         <a:effectLst/>
       </p:bgPr>
@@ -4943,8 +4973,8 @@
         </p:nvSpPr>
         <p:spPr>
           <a:xfrm>
-            <a:off x="0" y="731520"/>
-            <a:ext cx="12191695" cy="731520"/>
+            <a:off x="0" y="2286000"/>
+            <a:ext cx="12191695" cy="1097280"/>
           </a:xfrm>
           <a:prstGeom prst="rect">
             <a:avLst/>
@@ -4958,15 +4988,15 @@
           <a:lstStyle/>
           <a:p>
             <a:pPr algn="ctr">
-              <a:defRPr sz="3600" b="1">
-                <a:solidFill>
-                  <a:srgbClr val="F5F5F5"/>
-                </a:solidFill>
-                <a:latin typeface="Microsoft YaHei"/>
-              </a:defRPr>
-            </a:pPr>
-            <a:r>
-              <a:t>AI 服务费用</a:t>
+              <a:defRPr sz="4800" b="1">
+                <a:solidFill>
+                  <a:srgbClr val="1F2937"/>
+                </a:solidFill>
+                <a:latin typeface="Microsoft YaHei"/>
+              </a:defRPr>
+            </a:pPr>
+            <a:r>
+              <a:t>接下来，直接看效果</a:t>
             </a:r>
           </a:p>
         </p:txBody>
@@ -4979,14 +5009,14 @@
         </p:nvSpPr>
         <p:spPr>
           <a:xfrm>
-            <a:off x="5486400" y="1463040"/>
+            <a:off x="5486400" y="3383280"/>
             <a:ext cx="1188720" cy="25400"/>
           </a:xfrm>
           <a:prstGeom prst="rect">
             <a:avLst/>
           </a:prstGeom>
           <a:solidFill>
-            <a:srgbClr val="A086DA"/>
+            <a:srgbClr val="7C3AED"/>
           </a:solidFill>
           <a:ln>
             <a:noFill/>
@@ -5016,72 +5046,14 @@
       </p:sp>
       <p:sp>
         <p:nvSpPr>
-          <p:cNvPr id="4" name="Rounded Rectangle 3"/>
-          <p:cNvSpPr/>
-          <p:nvPr/>
-        </p:nvSpPr>
-        <p:spPr>
-          <a:xfrm>
-            <a:off x="2286000" y="2011680"/>
-            <a:ext cx="3200400" cy="731520"/>
-          </a:xfrm>
-          <a:prstGeom prst="roundRect">
-            <a:avLst/>
-          </a:prstGeom>
-          <a:solidFill>
-            <a:srgbClr val="2A273B"/>
-          </a:solidFill>
-          <a:ln w="19050">
-            <a:solidFill>
-              <a:srgbClr val="3C3852"/>
-            </a:solidFill>
-          </a:ln>
-        </p:spPr>
-        <p:style>
-          <a:lnRef idx="1">
-            <a:schemeClr val="accent1"/>
-          </a:lnRef>
-          <a:fillRef idx="3">
-            <a:schemeClr val="accent1"/>
-          </a:fillRef>
-          <a:effectRef idx="2">
-            <a:schemeClr val="accent1"/>
-          </a:effectRef>
-          <a:fontRef idx="minor">
-            <a:schemeClr val="lt1"/>
-          </a:fontRef>
-        </p:style>
-        <p:txBody>
-          <a:bodyPr rtlCol="0" anchor="ctr" wrap="square"/>
-          <a:lstStyle/>
-          <a:p>
-            <a:pPr algn="ctr">
-              <a:spcBef>
-                <a:spcPts val="0"/>
-              </a:spcBef>
-              <a:defRPr sz="2000">
-                <a:solidFill>
-                  <a:srgbClr val="9898B0"/>
-                </a:solidFill>
-                <a:latin typeface="Microsoft YaHei"/>
-              </a:defRPr>
-            </a:pPr>
-            <a:r>
-              <a:t>插件试用</a:t>
-            </a:r>
-          </a:p>
-        </p:txBody>
-      </p:sp>
-      <p:sp>
-        <p:nvSpPr>
-          <p:cNvPr id="5" name="TextBox 4"/>
+          <p:cNvPr id="4" name="TextBox 3"/>
           <p:cNvSpPr txBox="1"/>
           <p:nvPr/>
         </p:nvSpPr>
         <p:spPr>
           <a:xfrm>
-            <a:off x="5943600" y="2103120"/>
-            <a:ext cx="4114800" cy="548640"/>
+            <a:off x="0" y="3840480"/>
+            <a:ext cx="12191695" cy="731520"/>
           </a:xfrm>
           <a:prstGeom prst="rect">
             <a:avLst/>
@@ -5094,298 +5066,16 @@
           </a:bodyPr>
           <a:lstStyle/>
           <a:p>
-            <a:pPr algn="l">
-              <a:defRPr sz="2200" b="1">
-                <a:solidFill>
-                  <a:srgbClr val="4EC9B0"/>
-                </a:solidFill>
-                <a:latin typeface="Microsoft YaHei"/>
-              </a:defRPr>
-            </a:pPr>
-            <a:r>
-              <a:t>首次编译后 14 天免费</a:t>
-            </a:r>
-          </a:p>
-        </p:txBody>
-      </p:sp>
-      <p:sp>
-        <p:nvSpPr>
-          <p:cNvPr id="6" name="Rounded Rectangle 5"/>
-          <p:cNvSpPr/>
-          <p:nvPr/>
-        </p:nvSpPr>
-        <p:spPr>
-          <a:xfrm>
-            <a:off x="2286000" y="3017520"/>
-            <a:ext cx="3200400" cy="731520"/>
-          </a:xfrm>
-          <a:prstGeom prst="roundRect">
-            <a:avLst/>
-          </a:prstGeom>
-          <a:solidFill>
-            <a:srgbClr val="2A273B"/>
-          </a:solidFill>
-          <a:ln w="19050">
-            <a:solidFill>
-              <a:srgbClr val="3C3852"/>
-            </a:solidFill>
-          </a:ln>
-        </p:spPr>
-        <p:style>
-          <a:lnRef idx="1">
-            <a:schemeClr val="accent1"/>
-          </a:lnRef>
-          <a:fillRef idx="3">
-            <a:schemeClr val="accent1"/>
-          </a:fillRef>
-          <a:effectRef idx="2">
-            <a:schemeClr val="accent1"/>
-          </a:effectRef>
-          <a:fontRef idx="minor">
-            <a:schemeClr val="lt1"/>
-          </a:fontRef>
-        </p:style>
-        <p:txBody>
-          <a:bodyPr rtlCol="0" anchor="ctr" wrap="square"/>
-          <a:lstStyle/>
-          <a:p>
             <a:pPr algn="ctr">
-              <a:spcBef>
-                <a:spcPts val="0"/>
-              </a:spcBef>
-              <a:defRPr sz="2000">
-                <a:solidFill>
-                  <a:srgbClr val="9898B0"/>
-                </a:solidFill>
-                <a:latin typeface="Microsoft YaHei"/>
-              </a:defRPr>
-            </a:pPr>
-            <a:r>
-              <a:t>插件买断</a:t>
-            </a:r>
-          </a:p>
-        </p:txBody>
-      </p:sp>
-      <p:sp>
-        <p:nvSpPr>
-          <p:cNvPr id="7" name="TextBox 6"/>
-          <p:cNvSpPr txBox="1"/>
-          <p:nvPr/>
-        </p:nvSpPr>
-        <p:spPr>
-          <a:xfrm>
-            <a:off x="5943600" y="3108960"/>
-            <a:ext cx="4114800" cy="548640"/>
-          </a:xfrm>
-          <a:prstGeom prst="rect">
-            <a:avLst/>
-          </a:prstGeom>
-          <a:noFill/>
-        </p:spPr>
-        <p:txBody>
-          <a:bodyPr wrap="square">
-            <a:spAutoFit/>
-          </a:bodyPr>
-          <a:lstStyle/>
-          <a:p>
-            <a:pPr algn="l">
-              <a:defRPr sz="2200" b="1">
-                <a:solidFill>
-                  <a:srgbClr val="4EC9B0"/>
-                </a:solidFill>
-                <a:latin typeface="Microsoft YaHei"/>
-              </a:defRPr>
-            </a:pPr>
-            <a:r>
-              <a:t>¥ 30 一次买断</a:t>
-            </a:r>
-          </a:p>
-        </p:txBody>
-      </p:sp>
-      <p:sp>
-        <p:nvSpPr>
-          <p:cNvPr id="8" name="Rounded Rectangle 7"/>
-          <p:cNvSpPr/>
-          <p:nvPr/>
-        </p:nvSpPr>
-        <p:spPr>
-          <a:xfrm>
-            <a:off x="2286000" y="4023360"/>
-            <a:ext cx="3200400" cy="731520"/>
-          </a:xfrm>
-          <a:prstGeom prst="roundRect">
-            <a:avLst/>
-          </a:prstGeom>
-          <a:solidFill>
-            <a:srgbClr val="2A273B"/>
-          </a:solidFill>
-          <a:ln w="19050">
-            <a:solidFill>
-              <a:srgbClr val="3C3852"/>
-            </a:solidFill>
-          </a:ln>
-        </p:spPr>
-        <p:style>
-          <a:lnRef idx="1">
-            <a:schemeClr val="accent1"/>
-          </a:lnRef>
-          <a:fillRef idx="3">
-            <a:schemeClr val="accent1"/>
-          </a:fillRef>
-          <a:effectRef idx="2">
-            <a:schemeClr val="accent1"/>
-          </a:effectRef>
-          <a:fontRef idx="minor">
-            <a:schemeClr val="lt1"/>
-          </a:fontRef>
-        </p:style>
-        <p:txBody>
-          <a:bodyPr rtlCol="0" anchor="ctr" wrap="square"/>
-          <a:lstStyle/>
-          <a:p>
-            <a:pPr algn="ctr">
-              <a:spcBef>
-                <a:spcPts val="0"/>
-              </a:spcBef>
-              <a:defRPr sz="2000">
-                <a:solidFill>
-                  <a:srgbClr val="9898B0"/>
-                </a:solidFill>
-                <a:latin typeface="Microsoft YaHei"/>
-              </a:defRPr>
-            </a:pPr>
-            <a:r>
-              <a:t>DeepSeek API（推荐）</a:t>
-            </a:r>
-          </a:p>
-        </p:txBody>
-      </p:sp>
-      <p:sp>
-        <p:nvSpPr>
-          <p:cNvPr id="9" name="TextBox 8"/>
-          <p:cNvSpPr txBox="1"/>
-          <p:nvPr/>
-        </p:nvSpPr>
-        <p:spPr>
-          <a:xfrm>
-            <a:off x="5943600" y="4114800"/>
-            <a:ext cx="4114800" cy="548640"/>
-          </a:xfrm>
-          <a:prstGeom prst="rect">
-            <a:avLst/>
-          </a:prstGeom>
-          <a:noFill/>
-        </p:spPr>
-        <p:txBody>
-          <a:bodyPr wrap="square">
-            <a:spAutoFit/>
-          </a:bodyPr>
-          <a:lstStyle/>
-          <a:p>
-            <a:pPr algn="l">
-              <a:defRPr sz="2200" b="1">
-                <a:solidFill>
-                  <a:srgbClr val="4EC9B0"/>
-                </a:solidFill>
-                <a:latin typeface="Microsoft YaHei"/>
-              </a:defRPr>
-            </a:pPr>
-            <a:r>
-              <a:t>充值 10 元用几个月</a:t>
-            </a:r>
-          </a:p>
-        </p:txBody>
-      </p:sp>
-      <p:sp>
-        <p:nvSpPr>
-          <p:cNvPr id="10" name="Rounded Rectangle 9"/>
-          <p:cNvSpPr/>
-          <p:nvPr/>
-        </p:nvSpPr>
-        <p:spPr>
-          <a:xfrm>
-            <a:off x="2286000" y="5029200"/>
-            <a:ext cx="3200400" cy="731520"/>
-          </a:xfrm>
-          <a:prstGeom prst="roundRect">
-            <a:avLst/>
-          </a:prstGeom>
-          <a:solidFill>
-            <a:srgbClr val="2A273B"/>
-          </a:solidFill>
-          <a:ln w="19050">
-            <a:solidFill>
-              <a:srgbClr val="3C3852"/>
-            </a:solidFill>
-          </a:ln>
-        </p:spPr>
-        <p:style>
-          <a:lnRef idx="1">
-            <a:schemeClr val="accent1"/>
-          </a:lnRef>
-          <a:fillRef idx="3">
-            <a:schemeClr val="accent1"/>
-          </a:fillRef>
-          <a:effectRef idx="2">
-            <a:schemeClr val="accent1"/>
-          </a:effectRef>
-          <a:fontRef idx="minor">
-            <a:schemeClr val="lt1"/>
-          </a:fontRef>
-        </p:style>
-        <p:txBody>
-          <a:bodyPr rtlCol="0" anchor="ctr" wrap="square"/>
-          <a:lstStyle/>
-          <a:p>
-            <a:pPr algn="ctr">
-              <a:spcBef>
-                <a:spcPts val="0"/>
-              </a:spcBef>
-              <a:defRPr sz="2000">
-                <a:solidFill>
-                  <a:srgbClr val="9898B0"/>
-                </a:solidFill>
-                <a:latin typeface="Microsoft YaHei"/>
-              </a:defRPr>
-            </a:pPr>
-            <a:r>
-              <a:t>数据安全</a:t>
-            </a:r>
-          </a:p>
-        </p:txBody>
-      </p:sp>
-      <p:sp>
-        <p:nvSpPr>
-          <p:cNvPr id="11" name="TextBox 10"/>
-          <p:cNvSpPr txBox="1"/>
-          <p:nvPr/>
-        </p:nvSpPr>
-        <p:spPr>
-          <a:xfrm>
-            <a:off x="5943600" y="5120640"/>
-            <a:ext cx="4114800" cy="548640"/>
-          </a:xfrm>
-          <a:prstGeom prst="rect">
-            <a:avLst/>
-          </a:prstGeom>
-          <a:noFill/>
-        </p:spPr>
-        <p:txBody>
-          <a:bodyPr wrap="square">
-            <a:spAutoFit/>
-          </a:bodyPr>
-          <a:lstStyle/>
-          <a:p>
-            <a:pPr algn="l">
-              <a:defRPr sz="2200" b="1">
-                <a:solidFill>
-                  <a:srgbClr val="4EC9B0"/>
-                </a:solidFill>
-                <a:latin typeface="Microsoft YaHei"/>
-              </a:defRPr>
-            </a:pPr>
-            <a:r>
-              <a:t>全部留在本地，不上传</a:t>
+              <a:defRPr sz="2200" b="0">
+                <a:solidFill>
+                  <a:srgbClr val="6B7280"/>
+                </a:solidFill>
+                <a:latin typeface="Microsoft YaHei"/>
+              </a:defRPr>
+            </a:pPr>
+            <a:r>
+              <a:t>实操演示：安装 -&gt; 配置 -&gt; 编译 -&gt; 浏览 Wiki</a:t>
             </a:r>
           </a:p>
         </p:txBody>
@@ -5404,7 +5094,7 @@
     <p:bg>
       <p:bgPr>
         <a:solidFill>
-          <a:srgbClr val="1E1E2E"/>
+          <a:srgbClr val="F8F7FC"/>
         </a:solidFill>
         <a:effectLst/>
       </p:bgPr>
@@ -5424,7 +5114,7 @@
         </p:nvSpPr>
         <p:spPr>
           <a:xfrm>
-            <a:off x="0" y="731520"/>
+            <a:off x="0" y="365760"/>
             <a:ext cx="12191695" cy="731520"/>
           </a:xfrm>
           <a:prstGeom prst="rect">
@@ -5441,13 +5131,13 @@
             <a:pPr algn="ctr">
               <a:defRPr sz="3600" b="1">
                 <a:solidFill>
-                  <a:srgbClr val="F5F5F5"/>
-                </a:solidFill>
-                <a:latin typeface="Microsoft YaHei"/>
-              </a:defRPr>
-            </a:pPr>
-            <a:r>
-              <a:t>开始使用</a:t>
+                  <a:srgbClr val="1F2937"/>
+                </a:solidFill>
+                <a:latin typeface="Microsoft YaHei"/>
+              </a:defRPr>
+            </a:pPr>
+            <a:r>
+              <a:t>费用说明</a:t>
             </a:r>
           </a:p>
         </p:txBody>
@@ -5460,14 +5150,14 @@
         </p:nvSpPr>
         <p:spPr>
           <a:xfrm>
-            <a:off x="5486400" y="1463040"/>
+            <a:off x="5486400" y="1097280"/>
             <a:ext cx="1188720" cy="25400"/>
           </a:xfrm>
           <a:prstGeom prst="rect">
             <a:avLst/>
           </a:prstGeom>
           <a:solidFill>
-            <a:srgbClr val="A086DA"/>
+            <a:srgbClr val="7C3AED"/>
           </a:solidFill>
           <a:ln>
             <a:noFill/>
@@ -5497,23 +5187,25 @@
       </p:sp>
       <p:sp>
         <p:nvSpPr>
-          <p:cNvPr id="4" name="Oval 3"/>
+          <p:cNvPr id="4" name="Rounded Rectangle 3"/>
           <p:cNvSpPr/>
           <p:nvPr/>
         </p:nvSpPr>
         <p:spPr>
           <a:xfrm>
-            <a:off x="2743200" y="2011680"/>
-            <a:ext cx="640080" cy="640080"/>
-          </a:xfrm>
-          <a:prstGeom prst="ellipse">
+            <a:off x="1371600" y="1371600"/>
+            <a:ext cx="4114800" cy="4846320"/>
+          </a:xfrm>
+          <a:prstGeom prst="roundRect">
             <a:avLst/>
           </a:prstGeom>
           <a:solidFill>
-            <a:srgbClr val="7058A5"/>
+            <a:srgbClr val="EFEDF6"/>
           </a:solidFill>
-          <a:ln>
-            <a:noFill/>
+          <a:ln w="19050">
+            <a:solidFill>
+              <a:srgbClr val="DDDBE5"/>
+            </a:solidFill>
           </a:ln>
         </p:spPr>
         <p:style>
@@ -5531,23 +5223,10 @@
           </a:fontRef>
         </p:style>
         <p:txBody>
-          <a:bodyPr rtlCol="0" anchor="ctr" wrap="square"/>
-          <a:lstStyle/>
-          <a:p>
-            <a:pPr algn="ctr">
-              <a:spcBef>
-                <a:spcPts val="0"/>
-              </a:spcBef>
-              <a:defRPr sz="2200">
-                <a:solidFill>
-                  <a:srgbClr val="F5F5F5"/>
-                </a:solidFill>
-                <a:latin typeface="Microsoft YaHei"/>
-              </a:defRPr>
-            </a:pPr>
-            <a:r>
-              <a:t>1</a:t>
-            </a:r>
+          <a:bodyPr rtlCol="0" anchor="ctr"/>
+          <a:lstStyle/>
+          <a:p>
+            <a:pPr algn="ctr"/>
           </a:p>
         </p:txBody>
       </p:sp>
@@ -5559,8 +5238,8 @@
         </p:nvSpPr>
         <p:spPr>
           <a:xfrm>
-            <a:off x="3657600" y="2103120"/>
-            <a:ext cx="5486400" cy="548640"/>
+            <a:off x="1371600" y="1554480"/>
+            <a:ext cx="4114800" cy="457200"/>
           </a:xfrm>
           <a:prstGeom prst="rect">
             <a:avLst/>
@@ -5573,39 +5252,293 @@
           </a:bodyPr>
           <a:lstStyle/>
           <a:p>
+            <a:pPr algn="ctr">
+              <a:defRPr sz="2800" b="1">
+                <a:solidFill>
+                  <a:srgbClr val="6B7280"/>
+                </a:solidFill>
+                <a:latin typeface="Microsoft YaHei"/>
+              </a:defRPr>
+            </a:pPr>
+            <a:r>
+              <a:t>内测期间</a:t>
+            </a:r>
+          </a:p>
+        </p:txBody>
+      </p:sp>
+      <p:sp>
+        <p:nvSpPr>
+          <p:cNvPr id="6" name="TextBox 5"/>
+          <p:cNvSpPr txBox="1"/>
+          <p:nvPr/>
+        </p:nvSpPr>
+        <p:spPr>
+          <a:xfrm>
+            <a:off x="1371600" y="2103120"/>
+            <a:ext cx="4114800" cy="731520"/>
+          </a:xfrm>
+          <a:prstGeom prst="rect">
+            <a:avLst/>
+          </a:prstGeom>
+          <a:noFill/>
+        </p:spPr>
+        <p:txBody>
+          <a:bodyPr wrap="square">
+            <a:spAutoFit/>
+          </a:bodyPr>
+          <a:lstStyle/>
+          <a:p>
+            <a:pPr algn="ctr">
+              <a:defRPr sz="3600" b="1">
+                <a:solidFill>
+                  <a:srgbClr val="1F2937"/>
+                </a:solidFill>
+                <a:latin typeface="Microsoft YaHei"/>
+              </a:defRPr>
+            </a:pPr>
+            <a:r>
+              <a:t>免费体验全部功能</a:t>
+            </a:r>
+          </a:p>
+        </p:txBody>
+      </p:sp>
+      <p:sp>
+        <p:nvSpPr>
+          <p:cNvPr id="7" name="TextBox 6"/>
+          <p:cNvSpPr txBox="1"/>
+          <p:nvPr/>
+        </p:nvSpPr>
+        <p:spPr>
+          <a:xfrm>
+            <a:off x="1371600" y="2834640"/>
+            <a:ext cx="4114800" cy="457200"/>
+          </a:xfrm>
+          <a:prstGeom prst="rect">
+            <a:avLst/>
+          </a:prstGeom>
+          <a:noFill/>
+        </p:spPr>
+        <p:txBody>
+          <a:bodyPr wrap="square">
+            <a:spAutoFit/>
+          </a:bodyPr>
+          <a:lstStyle/>
+          <a:p>
+            <a:pPr algn="ctr">
+              <a:defRPr sz="1600" b="0">
+                <a:solidFill>
+                  <a:srgbClr val="9CA3AF"/>
+                </a:solidFill>
+                <a:latin typeface="Microsoft YaHei"/>
+              </a:defRPr>
+            </a:pPr>
+            <a:r>
+              <a:t>首次编译后 14 天全功能体验</a:t>
+            </a:r>
+          </a:p>
+        </p:txBody>
+      </p:sp>
+      <p:sp>
+        <p:nvSpPr>
+          <p:cNvPr id="8" name="TextBox 7"/>
+          <p:cNvSpPr txBox="1"/>
+          <p:nvPr/>
+        </p:nvSpPr>
+        <p:spPr>
+          <a:xfrm>
+            <a:off x="1828800" y="3474720"/>
+            <a:ext cx="3200400" cy="457200"/>
+          </a:xfrm>
+          <a:prstGeom prst="rect">
+            <a:avLst/>
+          </a:prstGeom>
+          <a:noFill/>
+        </p:spPr>
+        <p:txBody>
+          <a:bodyPr wrap="square">
+            <a:spAutoFit/>
+          </a:bodyPr>
+          <a:lstStyle/>
+          <a:p>
             <a:pPr algn="l">
-              <a:defRPr sz="2400" b="0">
-                <a:solidFill>
-                  <a:srgbClr val="DCDCDC"/>
-                </a:solidFill>
-                <a:latin typeface="Microsoft YaHei"/>
-              </a:defRPr>
-            </a:pPr>
-            <a:r>
-              <a:t>从 GitHub Releases 下载 zip 包</a:t>
-            </a:r>
-          </a:p>
-        </p:txBody>
-      </p:sp>
-      <p:sp>
-        <p:nvSpPr>
-          <p:cNvPr id="6" name="Oval 5"/>
+              <a:defRPr sz="1500" b="0">
+                <a:solidFill>
+                  <a:srgbClr val="6B7280"/>
+                </a:solidFill>
+                <a:latin typeface="Microsoft YaHei"/>
+              </a:defRPr>
+            </a:pPr>
+            <a:r>
+              <a:t>✓  AI 编译（全量 / 单文件）</a:t>
+            </a:r>
+          </a:p>
+        </p:txBody>
+      </p:sp>
+      <p:sp>
+        <p:nvSpPr>
+          <p:cNvPr id="9" name="TextBox 8"/>
+          <p:cNvSpPr txBox="1"/>
+          <p:nvPr/>
+        </p:nvSpPr>
+        <p:spPr>
+          <a:xfrm>
+            <a:off x="1828800" y="3950208"/>
+            <a:ext cx="3200400" cy="457200"/>
+          </a:xfrm>
+          <a:prstGeom prst="rect">
+            <a:avLst/>
+          </a:prstGeom>
+          <a:noFill/>
+        </p:spPr>
+        <p:txBody>
+          <a:bodyPr wrap="square">
+            <a:spAutoFit/>
+          </a:bodyPr>
+          <a:lstStyle/>
+          <a:p>
+            <a:pPr algn="l">
+              <a:defRPr sz="1500" b="0">
+                <a:solidFill>
+                  <a:srgbClr val="6B7280"/>
+                </a:solidFill>
+                <a:latin typeface="Microsoft YaHei"/>
+              </a:defRPr>
+            </a:pPr>
+            <a:r>
+              <a:t>✓  Wiki 浏览器 + AI 对话</a:t>
+            </a:r>
+          </a:p>
+        </p:txBody>
+      </p:sp>
+      <p:sp>
+        <p:nvSpPr>
+          <p:cNvPr id="10" name="TextBox 9"/>
+          <p:cNvSpPr txBox="1"/>
+          <p:nvPr/>
+        </p:nvSpPr>
+        <p:spPr>
+          <a:xfrm>
+            <a:off x="1828800" y="4425696"/>
+            <a:ext cx="3200400" cy="457200"/>
+          </a:xfrm>
+          <a:prstGeom prst="rect">
+            <a:avLst/>
+          </a:prstGeom>
+          <a:noFill/>
+        </p:spPr>
+        <p:txBody>
+          <a:bodyPr wrap="square">
+            <a:spAutoFit/>
+          </a:bodyPr>
+          <a:lstStyle/>
+          <a:p>
+            <a:pPr algn="l">
+              <a:defRPr sz="1500" b="0">
+                <a:solidFill>
+                  <a:srgbClr val="6B7280"/>
+                </a:solidFill>
+                <a:latin typeface="Microsoft YaHei"/>
+              </a:defRPr>
+            </a:pPr>
+            <a:r>
+              <a:t>✓  自动编译 + 语义搜索</a:t>
+            </a:r>
+          </a:p>
+        </p:txBody>
+      </p:sp>
+      <p:sp>
+        <p:nvSpPr>
+          <p:cNvPr id="11" name="TextBox 10"/>
+          <p:cNvSpPr txBox="1"/>
+          <p:nvPr/>
+        </p:nvSpPr>
+        <p:spPr>
+          <a:xfrm>
+            <a:off x="1828800" y="4901184"/>
+            <a:ext cx="3200400" cy="457200"/>
+          </a:xfrm>
+          <a:prstGeom prst="rect">
+            <a:avLst/>
+          </a:prstGeom>
+          <a:noFill/>
+        </p:spPr>
+        <p:txBody>
+          <a:bodyPr wrap="square">
+            <a:spAutoFit/>
+          </a:bodyPr>
+          <a:lstStyle/>
+          <a:p>
+            <a:pPr algn="l">
+              <a:defRPr sz="1500" b="0">
+                <a:solidFill>
+                  <a:srgbClr val="6B7280"/>
+                </a:solidFill>
+                <a:latin typeface="Microsoft YaHei"/>
+              </a:defRPr>
+            </a:pPr>
+            <a:r>
+              <a:t>✓  多 LLM 支持 + 多语言</a:t>
+            </a:r>
+          </a:p>
+        </p:txBody>
+      </p:sp>
+      <p:sp>
+        <p:nvSpPr>
+          <p:cNvPr id="12" name="TextBox 11"/>
+          <p:cNvSpPr txBox="1"/>
+          <p:nvPr/>
+        </p:nvSpPr>
+        <p:spPr>
+          <a:xfrm>
+            <a:off x="1828800" y="5376672"/>
+            <a:ext cx="3200400" cy="457200"/>
+          </a:xfrm>
+          <a:prstGeom prst="rect">
+            <a:avLst/>
+          </a:prstGeom>
+          <a:noFill/>
+        </p:spPr>
+        <p:txBody>
+          <a:bodyPr wrap="square">
+            <a:spAutoFit/>
+          </a:bodyPr>
+          <a:lstStyle/>
+          <a:p>
+            <a:pPr algn="l">
+              <a:defRPr sz="1500" b="0">
+                <a:solidFill>
+                  <a:srgbClr val="6B7280"/>
+                </a:solidFill>
+                <a:latin typeface="Microsoft YaHei"/>
+              </a:defRPr>
+            </a:pPr>
+            <a:r>
+              <a:t>✓  知识健康度检查</a:t>
+            </a:r>
+          </a:p>
+        </p:txBody>
+      </p:sp>
+      <p:sp>
+        <p:nvSpPr>
+          <p:cNvPr id="13" name="Rounded Rectangle 12"/>
           <p:cNvSpPr/>
           <p:nvPr/>
         </p:nvSpPr>
         <p:spPr>
           <a:xfrm>
-            <a:off x="2743200" y="2926080"/>
-            <a:ext cx="640080" cy="640080"/>
-          </a:xfrm>
-          <a:prstGeom prst="ellipse">
+            <a:off x="6400800" y="1371600"/>
+            <a:ext cx="4389120" cy="4846320"/>
+          </a:xfrm>
+          <a:prstGeom prst="roundRect">
             <a:avLst/>
           </a:prstGeom>
           <a:solidFill>
-            <a:srgbClr val="7058A5"/>
+            <a:srgbClr val="DDDBE5"/>
           </a:solidFill>
-          <a:ln>
-            <a:noFill/>
+          <a:ln w="19050">
+            <a:solidFill>
+              <a:srgbClr val="7C3AED"/>
+            </a:solidFill>
           </a:ln>
         </p:spPr>
         <p:style>
@@ -5623,78 +5556,29 @@
           </a:fontRef>
         </p:style>
         <p:txBody>
-          <a:bodyPr rtlCol="0" anchor="ctr" wrap="square"/>
-          <a:lstStyle/>
-          <a:p>
-            <a:pPr algn="ctr">
-              <a:spcBef>
-                <a:spcPts val="0"/>
-              </a:spcBef>
-              <a:defRPr sz="2200">
-                <a:solidFill>
-                  <a:srgbClr val="F5F5F5"/>
-                </a:solidFill>
-                <a:latin typeface="Microsoft YaHei"/>
-              </a:defRPr>
-            </a:pPr>
-            <a:r>
-              <a:t>2</a:t>
-            </a:r>
-          </a:p>
-        </p:txBody>
-      </p:sp>
-      <p:sp>
-        <p:nvSpPr>
-          <p:cNvPr id="7" name="TextBox 6"/>
-          <p:cNvSpPr txBox="1"/>
-          <p:nvPr/>
-        </p:nvSpPr>
-        <p:spPr>
-          <a:xfrm>
-            <a:off x="3657600" y="3017520"/>
-            <a:ext cx="5486400" cy="548640"/>
-          </a:xfrm>
-          <a:prstGeom prst="rect">
-            <a:avLst/>
-          </a:prstGeom>
-          <a:noFill/>
-        </p:spPr>
-        <p:txBody>
-          <a:bodyPr wrap="square">
-            <a:spAutoFit/>
-          </a:bodyPr>
-          <a:lstStyle/>
-          <a:p>
-            <a:pPr algn="l">
-              <a:defRPr sz="2400" b="0">
-                <a:solidFill>
-                  <a:srgbClr val="DCDCDC"/>
-                </a:solidFill>
-                <a:latin typeface="Microsoft YaHei"/>
-              </a:defRPr>
-            </a:pPr>
-            <a:r>
-              <a:t>解压后用 Obsidian 打开</a:t>
-            </a:r>
-          </a:p>
-        </p:txBody>
-      </p:sp>
-      <p:sp>
-        <p:nvSpPr>
-          <p:cNvPr id="8" name="Oval 7"/>
+          <a:bodyPr rtlCol="0" anchor="ctr"/>
+          <a:lstStyle/>
+          <a:p>
+            <a:pPr algn="ctr"/>
+          </a:p>
+        </p:txBody>
+      </p:sp>
+      <p:sp>
+        <p:nvSpPr>
+          <p:cNvPr id="14" name="Rounded Rectangle 13"/>
           <p:cNvSpPr/>
           <p:nvPr/>
         </p:nvSpPr>
         <p:spPr>
           <a:xfrm>
-            <a:off x="2743200" y="3840480"/>
-            <a:ext cx="640080" cy="640080"/>
-          </a:xfrm>
-          <a:prstGeom prst="ellipse">
+            <a:off x="6675120" y="1188720"/>
+            <a:ext cx="1645920" cy="365760"/>
+          </a:xfrm>
+          <a:prstGeom prst="roundRect">
             <a:avLst/>
           </a:prstGeom>
           <a:solidFill>
-            <a:srgbClr val="7058A5"/>
+            <a:srgbClr val="7C3AED"/>
           </a:solidFill>
           <a:ln>
             <a:noFill/>
@@ -5722,29 +5606,29 @@
               <a:spcBef>
                 <a:spcPts val="0"/>
               </a:spcBef>
-              <a:defRPr sz="2200">
-                <a:solidFill>
-                  <a:srgbClr val="F5F5F5"/>
-                </a:solidFill>
-                <a:latin typeface="Microsoft YaHei"/>
-              </a:defRPr>
-            </a:pPr>
-            <a:r>
-              <a:t>3</a:t>
-            </a:r>
-          </a:p>
-        </p:txBody>
-      </p:sp>
-      <p:sp>
-        <p:nvSpPr>
-          <p:cNvPr id="9" name="TextBox 8"/>
+              <a:defRPr sz="1200">
+                <a:solidFill>
+                  <a:srgbClr val="1F2937"/>
+                </a:solidFill>
+                <a:latin typeface="Microsoft YaHei"/>
+              </a:defRPr>
+            </a:pPr>
+            <a:r>
+              <a:t>一次买断</a:t>
+            </a:r>
+          </a:p>
+        </p:txBody>
+      </p:sp>
+      <p:sp>
+        <p:nvSpPr>
+          <p:cNvPr id="15" name="TextBox 14"/>
           <p:cNvSpPr txBox="1"/>
           <p:nvPr/>
         </p:nvSpPr>
         <p:spPr>
           <a:xfrm>
-            <a:off x="3657600" y="3931920"/>
-            <a:ext cx="5486400" cy="548640"/>
+            <a:off x="6400800" y="1645920"/>
+            <a:ext cx="4389120" cy="457200"/>
           </a:xfrm>
           <a:prstGeom prst="rect">
             <a:avLst/>
@@ -5757,86 +5641,30 @@
           </a:bodyPr>
           <a:lstStyle/>
           <a:p>
-            <a:pPr algn="l">
-              <a:defRPr sz="2400" b="0">
-                <a:solidFill>
-                  <a:srgbClr val="DCDCDC"/>
-                </a:solidFill>
-                <a:latin typeface="Microsoft YaHei"/>
-              </a:defRPr>
-            </a:pPr>
-            <a:r>
-              <a:t>配置 DeepSeek API Key</a:t>
-            </a:r>
-          </a:p>
-        </p:txBody>
-      </p:sp>
-      <p:sp>
-        <p:nvSpPr>
-          <p:cNvPr id="10" name="Oval 9"/>
-          <p:cNvSpPr/>
-          <p:nvPr/>
-        </p:nvSpPr>
-        <p:spPr>
-          <a:xfrm>
-            <a:off x="2743200" y="4754880"/>
-            <a:ext cx="640080" cy="640080"/>
-          </a:xfrm>
-          <a:prstGeom prst="ellipse">
-            <a:avLst/>
-          </a:prstGeom>
-          <a:solidFill>
-            <a:srgbClr val="7058A5"/>
-          </a:solidFill>
-          <a:ln>
-            <a:noFill/>
-          </a:ln>
-        </p:spPr>
-        <p:style>
-          <a:lnRef idx="1">
-            <a:schemeClr val="accent1"/>
-          </a:lnRef>
-          <a:fillRef idx="3">
-            <a:schemeClr val="accent1"/>
-          </a:fillRef>
-          <a:effectRef idx="2">
-            <a:schemeClr val="accent1"/>
-          </a:effectRef>
-          <a:fontRef idx="minor">
-            <a:schemeClr val="lt1"/>
-          </a:fontRef>
-        </p:style>
-        <p:txBody>
-          <a:bodyPr rtlCol="0" anchor="ctr" wrap="square"/>
-          <a:lstStyle/>
-          <a:p>
             <a:pPr algn="ctr">
-              <a:spcBef>
-                <a:spcPts val="0"/>
-              </a:spcBef>
-              <a:defRPr sz="2200">
-                <a:solidFill>
-                  <a:srgbClr val="F5F5F5"/>
-                </a:solidFill>
-                <a:latin typeface="Microsoft YaHei"/>
-              </a:defRPr>
-            </a:pPr>
-            <a:r>
-              <a:t>4</a:t>
-            </a:r>
-          </a:p>
-        </p:txBody>
-      </p:sp>
-      <p:sp>
-        <p:nvSpPr>
-          <p:cNvPr id="11" name="TextBox 10"/>
+              <a:defRPr sz="2800" b="1">
+                <a:solidFill>
+                  <a:srgbClr val="6D28D9"/>
+                </a:solidFill>
+                <a:latin typeface="Microsoft YaHei"/>
+              </a:defRPr>
+            </a:pPr>
+            <a:r>
+              <a:t>全功能版</a:t>
+            </a:r>
+          </a:p>
+        </p:txBody>
+      </p:sp>
+      <p:sp>
+        <p:nvSpPr>
+          <p:cNvPr id="16" name="TextBox 15"/>
           <p:cNvSpPr txBox="1"/>
           <p:nvPr/>
         </p:nvSpPr>
         <p:spPr>
           <a:xfrm>
-            <a:off x="3657600" y="4846320"/>
-            <a:ext cx="5486400" cy="548640"/>
+            <a:off x="6400800" y="2194560"/>
+            <a:ext cx="4389120" cy="731520"/>
           </a:xfrm>
           <a:prstGeom prst="rect">
             <a:avLst/>
@@ -5849,16 +5677,232 @@
           </a:bodyPr>
           <a:lstStyle/>
           <a:p>
+            <a:pPr algn="ctr">
+              <a:defRPr sz="5200" b="1">
+                <a:solidFill>
+                  <a:srgbClr val="1F2937"/>
+                </a:solidFill>
+                <a:latin typeface="Microsoft YaHei"/>
+              </a:defRPr>
+            </a:pPr>
+            <a:r>
+              <a:t>¥ 30</a:t>
+            </a:r>
+          </a:p>
+        </p:txBody>
+      </p:sp>
+      <p:sp>
+        <p:nvSpPr>
+          <p:cNvPr id="17" name="TextBox 16"/>
+          <p:cNvSpPr txBox="1"/>
+          <p:nvPr/>
+        </p:nvSpPr>
+        <p:spPr>
+          <a:xfrm>
+            <a:off x="6858000" y="3108960"/>
+            <a:ext cx="3474720" cy="457200"/>
+          </a:xfrm>
+          <a:prstGeom prst="rect">
+            <a:avLst/>
+          </a:prstGeom>
+          <a:noFill/>
+        </p:spPr>
+        <p:txBody>
+          <a:bodyPr wrap="square">
+            <a:spAutoFit/>
+          </a:bodyPr>
+          <a:lstStyle/>
+          <a:p>
             <a:pPr algn="l">
-              <a:defRPr sz="2400" b="0">
-                <a:solidFill>
-                  <a:srgbClr val="DCDCDC"/>
-                </a:solidFill>
-                <a:latin typeface="Microsoft YaHei"/>
-              </a:defRPr>
-            </a:pPr>
-            <a:r>
-              <a:t>开始编译</a:t>
+              <a:defRPr sz="1500" b="0">
+                <a:solidFill>
+                  <a:srgbClr val="374151"/>
+                </a:solidFill>
+                <a:latin typeface="Microsoft YaHei"/>
+              </a:defRPr>
+            </a:pPr>
+            <a:r>
+              <a:t>✓  试用期全部功能，无限制</a:t>
+            </a:r>
+          </a:p>
+        </p:txBody>
+      </p:sp>
+      <p:sp>
+        <p:nvSpPr>
+          <p:cNvPr id="18" name="TextBox 17"/>
+          <p:cNvSpPr txBox="1"/>
+          <p:nvPr/>
+        </p:nvSpPr>
+        <p:spPr>
+          <a:xfrm>
+            <a:off x="6858000" y="3584448"/>
+            <a:ext cx="3474720" cy="457200"/>
+          </a:xfrm>
+          <a:prstGeom prst="rect">
+            <a:avLst/>
+          </a:prstGeom>
+          <a:noFill/>
+        </p:spPr>
+        <p:txBody>
+          <a:bodyPr wrap="square">
+            <a:spAutoFit/>
+          </a:bodyPr>
+          <a:lstStyle/>
+          <a:p>
+            <a:pPr algn="l">
+              <a:defRPr sz="1500" b="0">
+                <a:solidFill>
+                  <a:srgbClr val="374151"/>
+                </a:solidFill>
+                <a:latin typeface="Microsoft YaHei"/>
+              </a:defRPr>
+            </a:pPr>
+            <a:r>
+              <a:t>✓  自动编译 -- 新素材自动处理</a:t>
+            </a:r>
+          </a:p>
+        </p:txBody>
+      </p:sp>
+      <p:sp>
+        <p:nvSpPr>
+          <p:cNvPr id="19" name="TextBox 18"/>
+          <p:cNvSpPr txBox="1"/>
+          <p:nvPr/>
+        </p:nvSpPr>
+        <p:spPr>
+          <a:xfrm>
+            <a:off x="6858000" y="4059936"/>
+            <a:ext cx="3474720" cy="457200"/>
+          </a:xfrm>
+          <a:prstGeom prst="rect">
+            <a:avLst/>
+          </a:prstGeom>
+          <a:noFill/>
+        </p:spPr>
+        <p:txBody>
+          <a:bodyPr wrap="square">
+            <a:spAutoFit/>
+          </a:bodyPr>
+          <a:lstStyle/>
+          <a:p>
+            <a:pPr algn="l">
+              <a:defRPr sz="1500" b="0">
+                <a:solidFill>
+                  <a:srgbClr val="374151"/>
+                </a:solidFill>
+                <a:latin typeface="Microsoft YaHei"/>
+              </a:defRPr>
+            </a:pPr>
+            <a:r>
+              <a:t>✓  AI 对话 -- 回答引用 [[wiki-links]]</a:t>
+            </a:r>
+          </a:p>
+        </p:txBody>
+      </p:sp>
+      <p:sp>
+        <p:nvSpPr>
+          <p:cNvPr id="20" name="TextBox 19"/>
+          <p:cNvSpPr txBox="1"/>
+          <p:nvPr/>
+        </p:nvSpPr>
+        <p:spPr>
+          <a:xfrm>
+            <a:off x="6858000" y="4535424"/>
+            <a:ext cx="3474720" cy="457200"/>
+          </a:xfrm>
+          <a:prstGeom prst="rect">
+            <a:avLst/>
+          </a:prstGeom>
+          <a:noFill/>
+        </p:spPr>
+        <p:txBody>
+          <a:bodyPr wrap="square">
+            <a:spAutoFit/>
+          </a:bodyPr>
+          <a:lstStyle/>
+          <a:p>
+            <a:pPr algn="l">
+              <a:defRPr sz="1500" b="0">
+                <a:solidFill>
+                  <a:srgbClr val="374151"/>
+                </a:solidFill>
+                <a:latin typeface="Microsoft YaHei"/>
+              </a:defRPr>
+            </a:pPr>
+            <a:r>
+              <a:t>✓  一键切换 LLM 后端</a:t>
+            </a:r>
+          </a:p>
+        </p:txBody>
+      </p:sp>
+      <p:sp>
+        <p:nvSpPr>
+          <p:cNvPr id="21" name="TextBox 20"/>
+          <p:cNvSpPr txBox="1"/>
+          <p:nvPr/>
+        </p:nvSpPr>
+        <p:spPr>
+          <a:xfrm>
+            <a:off x="6858000" y="5010912"/>
+            <a:ext cx="3474720" cy="457200"/>
+          </a:xfrm>
+          <a:prstGeom prst="rect">
+            <a:avLst/>
+          </a:prstGeom>
+          <a:noFill/>
+        </p:spPr>
+        <p:txBody>
+          <a:bodyPr wrap="square">
+            <a:spAutoFit/>
+          </a:bodyPr>
+          <a:lstStyle/>
+          <a:p>
+            <a:pPr algn="l">
+              <a:defRPr sz="1500" b="0">
+                <a:solidFill>
+                  <a:srgbClr val="374151"/>
+                </a:solidFill>
+                <a:latin typeface="Microsoft YaHei"/>
+              </a:defRPr>
+            </a:pPr>
+            <a:r>
+              <a:t>✓  知识健康度检查</a:t>
+            </a:r>
+          </a:p>
+        </p:txBody>
+      </p:sp>
+      <p:sp>
+        <p:nvSpPr>
+          <p:cNvPr id="22" name="TextBox 21"/>
+          <p:cNvSpPr txBox="1"/>
+          <p:nvPr/>
+        </p:nvSpPr>
+        <p:spPr>
+          <a:xfrm>
+            <a:off x="6858000" y="5486400"/>
+            <a:ext cx="3474720" cy="457200"/>
+          </a:xfrm>
+          <a:prstGeom prst="rect">
+            <a:avLst/>
+          </a:prstGeom>
+          <a:noFill/>
+        </p:spPr>
+        <p:txBody>
+          <a:bodyPr wrap="square">
+            <a:spAutoFit/>
+          </a:bodyPr>
+          <a:lstStyle/>
+          <a:p>
+            <a:pPr algn="l">
+              <a:defRPr sz="1500" b="0">
+                <a:solidFill>
+                  <a:srgbClr val="374151"/>
+                </a:solidFill>
+                <a:latin typeface="Microsoft YaHei"/>
+              </a:defRPr>
+            </a:pPr>
+            <a:r>
+              <a:t>✓  不搞订阅，买一次用一辈子</a:t>
             </a:r>
           </a:p>
         </p:txBody>
@@ -5877,7 +5921,7 @@
     <p:bg>
       <p:bgPr>
         <a:solidFill>
-          <a:srgbClr val="1E1E2E"/>
+          <a:srgbClr val="F8F7FC"/>
         </a:solidFill>
         <a:effectLst/>
       </p:bgPr>
@@ -5897,8 +5941,8 @@
         </p:nvSpPr>
         <p:spPr>
           <a:xfrm>
-            <a:off x="0" y="1371600"/>
-            <a:ext cx="12191695" cy="914400"/>
+            <a:off x="0" y="731520"/>
+            <a:ext cx="12191695" cy="731520"/>
           </a:xfrm>
           <a:prstGeom prst="rect">
             <a:avLst/>
@@ -5912,15 +5956,15 @@
           <a:lstStyle/>
           <a:p>
             <a:pPr algn="ctr">
-              <a:defRPr sz="4800" b="1">
-                <a:solidFill>
-                  <a:srgbClr val="F5F5F5"/>
-                </a:solidFill>
-                <a:latin typeface="Microsoft YaHei"/>
-              </a:defRPr>
-            </a:pPr>
-            <a:r>
-              <a:t>Second Brain</a:t>
+              <a:defRPr sz="3600" b="1">
+                <a:solidFill>
+                  <a:srgbClr val="1F2937"/>
+                </a:solidFill>
+                <a:latin typeface="Microsoft YaHei"/>
+              </a:defRPr>
+            </a:pPr>
+            <a:r>
+              <a:t>AI 服务费用</a:t>
             </a:r>
           </a:p>
         </p:txBody>
@@ -5933,14 +5977,14 @@
         </p:nvSpPr>
         <p:spPr>
           <a:xfrm>
-            <a:off x="5486400" y="2286000"/>
+            <a:off x="5486400" y="1463040"/>
             <a:ext cx="1188720" cy="25400"/>
           </a:xfrm>
           <a:prstGeom prst="rect">
             <a:avLst/>
           </a:prstGeom>
           <a:solidFill>
-            <a:srgbClr val="A086DA"/>
+            <a:srgbClr val="7C3AED"/>
           </a:solidFill>
           <a:ln>
             <a:noFill/>
@@ -5970,14 +6014,72 @@
       </p:sp>
       <p:sp>
         <p:nvSpPr>
-          <p:cNvPr id="4" name="TextBox 3"/>
+          <p:cNvPr id="4" name="Rounded Rectangle 3"/>
+          <p:cNvSpPr/>
+          <p:nvPr/>
+        </p:nvSpPr>
+        <p:spPr>
+          <a:xfrm>
+            <a:off x="2286000" y="2011680"/>
+            <a:ext cx="3200400" cy="731520"/>
+          </a:xfrm>
+          <a:prstGeom prst="roundRect">
+            <a:avLst/>
+          </a:prstGeom>
+          <a:solidFill>
+            <a:srgbClr val="EFEDF6"/>
+          </a:solidFill>
+          <a:ln w="19050">
+            <a:solidFill>
+              <a:srgbClr val="DDDBE5"/>
+            </a:solidFill>
+          </a:ln>
+        </p:spPr>
+        <p:style>
+          <a:lnRef idx="1">
+            <a:schemeClr val="accent1"/>
+          </a:lnRef>
+          <a:fillRef idx="3">
+            <a:schemeClr val="accent1"/>
+          </a:fillRef>
+          <a:effectRef idx="2">
+            <a:schemeClr val="accent1"/>
+          </a:effectRef>
+          <a:fontRef idx="minor">
+            <a:schemeClr val="lt1"/>
+          </a:fontRef>
+        </p:style>
+        <p:txBody>
+          <a:bodyPr rtlCol="0" anchor="ctr" wrap="square"/>
+          <a:lstStyle/>
+          <a:p>
+            <a:pPr algn="ctr">
+              <a:spcBef>
+                <a:spcPts val="0"/>
+              </a:spcBef>
+              <a:defRPr sz="2000">
+                <a:solidFill>
+                  <a:srgbClr val="6B7280"/>
+                </a:solidFill>
+                <a:latin typeface="Microsoft YaHei"/>
+              </a:defRPr>
+            </a:pPr>
+            <a:r>
+              <a:t>插件试用</a:t>
+            </a:r>
+          </a:p>
+        </p:txBody>
+      </p:sp>
+      <p:sp>
+        <p:nvSpPr>
+          <p:cNvPr id="5" name="TextBox 4"/>
           <p:cNvSpPr txBox="1"/>
           <p:nvPr/>
         </p:nvSpPr>
         <p:spPr>
           <a:xfrm>
-            <a:off x="0" y="2743200"/>
-            <a:ext cx="12191695" cy="548640"/>
+            <a:off x="5943600" y="2103120"/>
+            <a:ext cx="4114800" cy="548640"/>
           </a:xfrm>
           <a:prstGeom prst="rect">
             <a:avLst/>
@@ -5990,30 +6092,88 @@
           </a:bodyPr>
           <a:lstStyle/>
           <a:p>
+            <a:pPr algn="l">
+              <a:defRPr sz="2200" b="1">
+                <a:solidFill>
+                  <a:srgbClr val="059669"/>
+                </a:solidFill>
+                <a:latin typeface="Microsoft YaHei"/>
+              </a:defRPr>
+            </a:pPr>
+            <a:r>
+              <a:t>首次编译后 14 天免费</a:t>
+            </a:r>
+          </a:p>
+        </p:txBody>
+      </p:sp>
+      <p:sp>
+        <p:nvSpPr>
+          <p:cNvPr id="6" name="Rounded Rectangle 5"/>
+          <p:cNvSpPr/>
+          <p:nvPr/>
+        </p:nvSpPr>
+        <p:spPr>
+          <a:xfrm>
+            <a:off x="2286000" y="3017520"/>
+            <a:ext cx="3200400" cy="731520"/>
+          </a:xfrm>
+          <a:prstGeom prst="roundRect">
+            <a:avLst/>
+          </a:prstGeom>
+          <a:solidFill>
+            <a:srgbClr val="EFEDF6"/>
+          </a:solidFill>
+          <a:ln w="19050">
+            <a:solidFill>
+              <a:srgbClr val="DDDBE5"/>
+            </a:solidFill>
+          </a:ln>
+        </p:spPr>
+        <p:style>
+          <a:lnRef idx="1">
+            <a:schemeClr val="accent1"/>
+          </a:lnRef>
+          <a:fillRef idx="3">
+            <a:schemeClr val="accent1"/>
+          </a:fillRef>
+          <a:effectRef idx="2">
+            <a:schemeClr val="accent1"/>
+          </a:effectRef>
+          <a:fontRef idx="minor">
+            <a:schemeClr val="lt1"/>
+          </a:fontRef>
+        </p:style>
+        <p:txBody>
+          <a:bodyPr rtlCol="0" anchor="ctr" wrap="square"/>
+          <a:lstStyle/>
+          <a:p>
             <a:pPr algn="ctr">
-              <a:defRPr sz="2200" b="0">
-                <a:solidFill>
-                  <a:srgbClr val="9898B0"/>
-                </a:solidFill>
-                <a:latin typeface="Microsoft YaHei"/>
-              </a:defRPr>
-            </a:pPr>
-            <a:r>
-              <a:t>下载地址在简介和评论区置顶</a:t>
-            </a:r>
-          </a:p>
-        </p:txBody>
-      </p:sp>
-      <p:sp>
-        <p:nvSpPr>
-          <p:cNvPr id="5" name="TextBox 4"/>
+              <a:spcBef>
+                <a:spcPts val="0"/>
+              </a:spcBef>
+              <a:defRPr sz="2000">
+                <a:solidFill>
+                  <a:srgbClr val="6B7280"/>
+                </a:solidFill>
+                <a:latin typeface="Microsoft YaHei"/>
+              </a:defRPr>
+            </a:pPr>
+            <a:r>
+              <a:t>插件买断</a:t>
+            </a:r>
+          </a:p>
+        </p:txBody>
+      </p:sp>
+      <p:sp>
+        <p:nvSpPr>
+          <p:cNvPr id="7" name="TextBox 6"/>
           <p:cNvSpPr txBox="1"/>
           <p:nvPr/>
         </p:nvSpPr>
         <p:spPr>
           <a:xfrm>
-            <a:off x="0" y="3474720"/>
-            <a:ext cx="12191695" cy="548640"/>
+            <a:off x="5943600" y="3108960"/>
+            <a:ext cx="4114800" cy="548640"/>
           </a:xfrm>
           <a:prstGeom prst="rect">
             <a:avLst/>
@@ -6026,30 +6186,88 @@
           </a:bodyPr>
           <a:lstStyle/>
           <a:p>
+            <a:pPr algn="l">
+              <a:defRPr sz="2200" b="1">
+                <a:solidFill>
+                  <a:srgbClr val="059669"/>
+                </a:solidFill>
+                <a:latin typeface="Microsoft YaHei"/>
+              </a:defRPr>
+            </a:pPr>
+            <a:r>
+              <a:t>¥ 30 一次买断</a:t>
+            </a:r>
+          </a:p>
+        </p:txBody>
+      </p:sp>
+      <p:sp>
+        <p:nvSpPr>
+          <p:cNvPr id="8" name="Rounded Rectangle 7"/>
+          <p:cNvSpPr/>
+          <p:nvPr/>
+        </p:nvSpPr>
+        <p:spPr>
+          <a:xfrm>
+            <a:off x="2286000" y="4023360"/>
+            <a:ext cx="3200400" cy="731520"/>
+          </a:xfrm>
+          <a:prstGeom prst="roundRect">
+            <a:avLst/>
+          </a:prstGeom>
+          <a:solidFill>
+            <a:srgbClr val="EFEDF6"/>
+          </a:solidFill>
+          <a:ln w="19050">
+            <a:solidFill>
+              <a:srgbClr val="DDDBE5"/>
+            </a:solidFill>
+          </a:ln>
+        </p:spPr>
+        <p:style>
+          <a:lnRef idx="1">
+            <a:schemeClr val="accent1"/>
+          </a:lnRef>
+          <a:fillRef idx="3">
+            <a:schemeClr val="accent1"/>
+          </a:fillRef>
+          <a:effectRef idx="2">
+            <a:schemeClr val="accent1"/>
+          </a:effectRef>
+          <a:fontRef idx="minor">
+            <a:schemeClr val="lt1"/>
+          </a:fontRef>
+        </p:style>
+        <p:txBody>
+          <a:bodyPr rtlCol="0" anchor="ctr" wrap="square"/>
+          <a:lstStyle/>
+          <a:p>
             <a:pPr algn="ctr">
-              <a:defRPr sz="1800" b="0">
-                <a:solidFill>
-                  <a:srgbClr val="686880"/>
-                </a:solidFill>
-                <a:latin typeface="Microsoft YaHei"/>
-              </a:defRPr>
-            </a:pPr>
-            <a:r>
-              <a:t>爱发电: ifdian.net/a/ruowenwang</a:t>
-            </a:r>
-          </a:p>
-        </p:txBody>
-      </p:sp>
-      <p:sp>
-        <p:nvSpPr>
-          <p:cNvPr id="6" name="TextBox 5"/>
+              <a:spcBef>
+                <a:spcPts val="0"/>
+              </a:spcBef>
+              <a:defRPr sz="2000">
+                <a:solidFill>
+                  <a:srgbClr val="6B7280"/>
+                </a:solidFill>
+                <a:latin typeface="Microsoft YaHei"/>
+              </a:defRPr>
+            </a:pPr>
+            <a:r>
+              <a:t>DeepSeek API（推荐）</a:t>
+            </a:r>
+          </a:p>
+        </p:txBody>
+      </p:sp>
+      <p:sp>
+        <p:nvSpPr>
+          <p:cNvPr id="9" name="TextBox 8"/>
           <p:cNvSpPr txBox="1"/>
           <p:nvPr/>
         </p:nvSpPr>
         <p:spPr>
           <a:xfrm>
-            <a:off x="0" y="4754880"/>
-            <a:ext cx="12191695" cy="548640"/>
+            <a:off x="5943600" y="4114800"/>
+            <a:ext cx="4114800" cy="548640"/>
           </a:xfrm>
           <a:prstGeom prst="rect">
             <a:avLst/>
@@ -6062,10 +6280,790 @@
           </a:bodyPr>
           <a:lstStyle/>
           <a:p>
+            <a:pPr algn="l">
+              <a:defRPr sz="2200" b="1">
+                <a:solidFill>
+                  <a:srgbClr val="059669"/>
+                </a:solidFill>
+                <a:latin typeface="Microsoft YaHei"/>
+              </a:defRPr>
+            </a:pPr>
+            <a:r>
+              <a:t>充值 10 元用几个月</a:t>
+            </a:r>
+          </a:p>
+        </p:txBody>
+      </p:sp>
+      <p:sp>
+        <p:nvSpPr>
+          <p:cNvPr id="10" name="Rounded Rectangle 9"/>
+          <p:cNvSpPr/>
+          <p:nvPr/>
+        </p:nvSpPr>
+        <p:spPr>
+          <a:xfrm>
+            <a:off x="2286000" y="5029200"/>
+            <a:ext cx="3200400" cy="731520"/>
+          </a:xfrm>
+          <a:prstGeom prst="roundRect">
+            <a:avLst/>
+          </a:prstGeom>
+          <a:solidFill>
+            <a:srgbClr val="EFEDF6"/>
+          </a:solidFill>
+          <a:ln w="19050">
+            <a:solidFill>
+              <a:srgbClr val="DDDBE5"/>
+            </a:solidFill>
+          </a:ln>
+        </p:spPr>
+        <p:style>
+          <a:lnRef idx="1">
+            <a:schemeClr val="accent1"/>
+          </a:lnRef>
+          <a:fillRef idx="3">
+            <a:schemeClr val="accent1"/>
+          </a:fillRef>
+          <a:effectRef idx="2">
+            <a:schemeClr val="accent1"/>
+          </a:effectRef>
+          <a:fontRef idx="minor">
+            <a:schemeClr val="lt1"/>
+          </a:fontRef>
+        </p:style>
+        <p:txBody>
+          <a:bodyPr rtlCol="0" anchor="ctr" wrap="square"/>
+          <a:lstStyle/>
+          <a:p>
+            <a:pPr algn="ctr">
+              <a:spcBef>
+                <a:spcPts val="0"/>
+              </a:spcBef>
+              <a:defRPr sz="2000">
+                <a:solidFill>
+                  <a:srgbClr val="6B7280"/>
+                </a:solidFill>
+                <a:latin typeface="Microsoft YaHei"/>
+              </a:defRPr>
+            </a:pPr>
+            <a:r>
+              <a:t>数据安全</a:t>
+            </a:r>
+          </a:p>
+        </p:txBody>
+      </p:sp>
+      <p:sp>
+        <p:nvSpPr>
+          <p:cNvPr id="11" name="TextBox 10"/>
+          <p:cNvSpPr txBox="1"/>
+          <p:nvPr/>
+        </p:nvSpPr>
+        <p:spPr>
+          <a:xfrm>
+            <a:off x="5943600" y="5120640"/>
+            <a:ext cx="4114800" cy="548640"/>
+          </a:xfrm>
+          <a:prstGeom prst="rect">
+            <a:avLst/>
+          </a:prstGeom>
+          <a:noFill/>
+        </p:spPr>
+        <p:txBody>
+          <a:bodyPr wrap="square">
+            <a:spAutoFit/>
+          </a:bodyPr>
+          <a:lstStyle/>
+          <a:p>
+            <a:pPr algn="l">
+              <a:defRPr sz="2200" b="1">
+                <a:solidFill>
+                  <a:srgbClr val="059669"/>
+                </a:solidFill>
+                <a:latin typeface="Microsoft YaHei"/>
+              </a:defRPr>
+            </a:pPr>
+            <a:r>
+              <a:t>全部留在本地，不上传</a:t>
+            </a:r>
+          </a:p>
+        </p:txBody>
+      </p:sp>
+    </p:spTree>
+  </p:cSld>
+  <p:clrMapOvr>
+    <a:masterClrMapping/>
+  </p:clrMapOvr>
+</p:sld>
+</file>
+
+<file path=ppt/slides/slide17.xml><?xml version="1.0" encoding="utf-8"?>
+<p:sld xmlns:a="http://schemas.openxmlformats.org/drawingml/2006/main" xmlns:p="http://schemas.openxmlformats.org/presentationml/2006/main" xmlns:r="http://schemas.openxmlformats.org/officeDocument/2006/relationships">
+  <p:cSld>
+    <p:bg>
+      <p:bgPr>
+        <a:solidFill>
+          <a:srgbClr val="F8F7FC"/>
+        </a:solidFill>
+        <a:effectLst/>
+      </p:bgPr>
+    </p:bg>
+    <p:spTree>
+      <p:nvGrpSpPr>
+        <p:cNvPr id="1" name=""/>
+        <p:cNvGrpSpPr/>
+        <p:nvPr/>
+      </p:nvGrpSpPr>
+      <p:grpSpPr/>
+      <p:sp>
+        <p:nvSpPr>
+          <p:cNvPr id="2" name="TextBox 1"/>
+          <p:cNvSpPr txBox="1"/>
+          <p:nvPr/>
+        </p:nvSpPr>
+        <p:spPr>
+          <a:xfrm>
+            <a:off x="0" y="731520"/>
+            <a:ext cx="12191695" cy="731520"/>
+          </a:xfrm>
+          <a:prstGeom prst="rect">
+            <a:avLst/>
+          </a:prstGeom>
+          <a:noFill/>
+        </p:spPr>
+        <p:txBody>
+          <a:bodyPr wrap="square">
+            <a:spAutoFit/>
+          </a:bodyPr>
+          <a:lstStyle/>
+          <a:p>
+            <a:pPr algn="ctr">
+              <a:defRPr sz="3600" b="1">
+                <a:solidFill>
+                  <a:srgbClr val="1F2937"/>
+                </a:solidFill>
+                <a:latin typeface="Microsoft YaHei"/>
+              </a:defRPr>
+            </a:pPr>
+            <a:r>
+              <a:t>开始使用</a:t>
+            </a:r>
+          </a:p>
+        </p:txBody>
+      </p:sp>
+      <p:sp>
+        <p:nvSpPr>
+          <p:cNvPr id="3" name="Rectangle 2"/>
+          <p:cNvSpPr/>
+          <p:nvPr/>
+        </p:nvSpPr>
+        <p:spPr>
+          <a:xfrm>
+            <a:off x="5486400" y="1463040"/>
+            <a:ext cx="1188720" cy="25400"/>
+          </a:xfrm>
+          <a:prstGeom prst="rect">
+            <a:avLst/>
+          </a:prstGeom>
+          <a:solidFill>
+            <a:srgbClr val="7C3AED"/>
+          </a:solidFill>
+          <a:ln>
+            <a:noFill/>
+          </a:ln>
+        </p:spPr>
+        <p:style>
+          <a:lnRef idx="1">
+            <a:schemeClr val="accent1"/>
+          </a:lnRef>
+          <a:fillRef idx="3">
+            <a:schemeClr val="accent1"/>
+          </a:fillRef>
+          <a:effectRef idx="2">
+            <a:schemeClr val="accent1"/>
+          </a:effectRef>
+          <a:fontRef idx="minor">
+            <a:schemeClr val="lt1"/>
+          </a:fontRef>
+        </p:style>
+        <p:txBody>
+          <a:bodyPr rtlCol="0" anchor="ctr"/>
+          <a:lstStyle/>
+          <a:p>
+            <a:pPr algn="ctr"/>
+          </a:p>
+        </p:txBody>
+      </p:sp>
+      <p:sp>
+        <p:nvSpPr>
+          <p:cNvPr id="4" name="Oval 3"/>
+          <p:cNvSpPr/>
+          <p:nvPr/>
+        </p:nvSpPr>
+        <p:spPr>
+          <a:xfrm>
+            <a:off x="2743200" y="2011680"/>
+            <a:ext cx="640080" cy="640080"/>
+          </a:xfrm>
+          <a:prstGeom prst="ellipse">
+            <a:avLst/>
+          </a:prstGeom>
+          <a:solidFill>
+            <a:srgbClr val="A78BFA"/>
+          </a:solidFill>
+          <a:ln>
+            <a:noFill/>
+          </a:ln>
+        </p:spPr>
+        <p:style>
+          <a:lnRef idx="1">
+            <a:schemeClr val="accent1"/>
+          </a:lnRef>
+          <a:fillRef idx="3">
+            <a:schemeClr val="accent1"/>
+          </a:fillRef>
+          <a:effectRef idx="2">
+            <a:schemeClr val="accent1"/>
+          </a:effectRef>
+          <a:fontRef idx="minor">
+            <a:schemeClr val="lt1"/>
+          </a:fontRef>
+        </p:style>
+        <p:txBody>
+          <a:bodyPr rtlCol="0" anchor="ctr" wrap="square"/>
+          <a:lstStyle/>
+          <a:p>
+            <a:pPr algn="ctr">
+              <a:spcBef>
+                <a:spcPts val="0"/>
+              </a:spcBef>
+              <a:defRPr sz="2200">
+                <a:solidFill>
+                  <a:srgbClr val="1F2937"/>
+                </a:solidFill>
+                <a:latin typeface="Microsoft YaHei"/>
+              </a:defRPr>
+            </a:pPr>
+            <a:r>
+              <a:t>1</a:t>
+            </a:r>
+          </a:p>
+        </p:txBody>
+      </p:sp>
+      <p:sp>
+        <p:nvSpPr>
+          <p:cNvPr id="5" name="TextBox 4"/>
+          <p:cNvSpPr txBox="1"/>
+          <p:nvPr/>
+        </p:nvSpPr>
+        <p:spPr>
+          <a:xfrm>
+            <a:off x="3657600" y="2103120"/>
+            <a:ext cx="5486400" cy="548640"/>
+          </a:xfrm>
+          <a:prstGeom prst="rect">
+            <a:avLst/>
+          </a:prstGeom>
+          <a:noFill/>
+        </p:spPr>
+        <p:txBody>
+          <a:bodyPr wrap="square">
+            <a:spAutoFit/>
+          </a:bodyPr>
+          <a:lstStyle/>
+          <a:p>
+            <a:pPr algn="l">
+              <a:defRPr sz="2400" b="0">
+                <a:solidFill>
+                  <a:srgbClr val="374151"/>
+                </a:solidFill>
+                <a:latin typeface="Microsoft YaHei"/>
+              </a:defRPr>
+            </a:pPr>
+            <a:r>
+              <a:t>从 GitHub Releases 下载 zip 包</a:t>
+            </a:r>
+          </a:p>
+        </p:txBody>
+      </p:sp>
+      <p:sp>
+        <p:nvSpPr>
+          <p:cNvPr id="6" name="Oval 5"/>
+          <p:cNvSpPr/>
+          <p:nvPr/>
+        </p:nvSpPr>
+        <p:spPr>
+          <a:xfrm>
+            <a:off x="2743200" y="2926080"/>
+            <a:ext cx="640080" cy="640080"/>
+          </a:xfrm>
+          <a:prstGeom prst="ellipse">
+            <a:avLst/>
+          </a:prstGeom>
+          <a:solidFill>
+            <a:srgbClr val="A78BFA"/>
+          </a:solidFill>
+          <a:ln>
+            <a:noFill/>
+          </a:ln>
+        </p:spPr>
+        <p:style>
+          <a:lnRef idx="1">
+            <a:schemeClr val="accent1"/>
+          </a:lnRef>
+          <a:fillRef idx="3">
+            <a:schemeClr val="accent1"/>
+          </a:fillRef>
+          <a:effectRef idx="2">
+            <a:schemeClr val="accent1"/>
+          </a:effectRef>
+          <a:fontRef idx="minor">
+            <a:schemeClr val="lt1"/>
+          </a:fontRef>
+        </p:style>
+        <p:txBody>
+          <a:bodyPr rtlCol="0" anchor="ctr" wrap="square"/>
+          <a:lstStyle/>
+          <a:p>
+            <a:pPr algn="ctr">
+              <a:spcBef>
+                <a:spcPts val="0"/>
+              </a:spcBef>
+              <a:defRPr sz="2200">
+                <a:solidFill>
+                  <a:srgbClr val="1F2937"/>
+                </a:solidFill>
+                <a:latin typeface="Microsoft YaHei"/>
+              </a:defRPr>
+            </a:pPr>
+            <a:r>
+              <a:t>2</a:t>
+            </a:r>
+          </a:p>
+        </p:txBody>
+      </p:sp>
+      <p:sp>
+        <p:nvSpPr>
+          <p:cNvPr id="7" name="TextBox 6"/>
+          <p:cNvSpPr txBox="1"/>
+          <p:nvPr/>
+        </p:nvSpPr>
+        <p:spPr>
+          <a:xfrm>
+            <a:off x="3657600" y="3017520"/>
+            <a:ext cx="5486400" cy="548640"/>
+          </a:xfrm>
+          <a:prstGeom prst="rect">
+            <a:avLst/>
+          </a:prstGeom>
+          <a:noFill/>
+        </p:spPr>
+        <p:txBody>
+          <a:bodyPr wrap="square">
+            <a:spAutoFit/>
+          </a:bodyPr>
+          <a:lstStyle/>
+          <a:p>
+            <a:pPr algn="l">
+              <a:defRPr sz="2400" b="0">
+                <a:solidFill>
+                  <a:srgbClr val="374151"/>
+                </a:solidFill>
+                <a:latin typeface="Microsoft YaHei"/>
+              </a:defRPr>
+            </a:pPr>
+            <a:r>
+              <a:t>解压后用 Obsidian 打开</a:t>
+            </a:r>
+          </a:p>
+        </p:txBody>
+      </p:sp>
+      <p:sp>
+        <p:nvSpPr>
+          <p:cNvPr id="8" name="Oval 7"/>
+          <p:cNvSpPr/>
+          <p:nvPr/>
+        </p:nvSpPr>
+        <p:spPr>
+          <a:xfrm>
+            <a:off x="2743200" y="3840480"/>
+            <a:ext cx="640080" cy="640080"/>
+          </a:xfrm>
+          <a:prstGeom prst="ellipse">
+            <a:avLst/>
+          </a:prstGeom>
+          <a:solidFill>
+            <a:srgbClr val="A78BFA"/>
+          </a:solidFill>
+          <a:ln>
+            <a:noFill/>
+          </a:ln>
+        </p:spPr>
+        <p:style>
+          <a:lnRef idx="1">
+            <a:schemeClr val="accent1"/>
+          </a:lnRef>
+          <a:fillRef idx="3">
+            <a:schemeClr val="accent1"/>
+          </a:fillRef>
+          <a:effectRef idx="2">
+            <a:schemeClr val="accent1"/>
+          </a:effectRef>
+          <a:fontRef idx="minor">
+            <a:schemeClr val="lt1"/>
+          </a:fontRef>
+        </p:style>
+        <p:txBody>
+          <a:bodyPr rtlCol="0" anchor="ctr" wrap="square"/>
+          <a:lstStyle/>
+          <a:p>
+            <a:pPr algn="ctr">
+              <a:spcBef>
+                <a:spcPts val="0"/>
+              </a:spcBef>
+              <a:defRPr sz="2200">
+                <a:solidFill>
+                  <a:srgbClr val="1F2937"/>
+                </a:solidFill>
+                <a:latin typeface="Microsoft YaHei"/>
+              </a:defRPr>
+            </a:pPr>
+            <a:r>
+              <a:t>3</a:t>
+            </a:r>
+          </a:p>
+        </p:txBody>
+      </p:sp>
+      <p:sp>
+        <p:nvSpPr>
+          <p:cNvPr id="9" name="TextBox 8"/>
+          <p:cNvSpPr txBox="1"/>
+          <p:nvPr/>
+        </p:nvSpPr>
+        <p:spPr>
+          <a:xfrm>
+            <a:off x="3657600" y="3931920"/>
+            <a:ext cx="5486400" cy="548640"/>
+          </a:xfrm>
+          <a:prstGeom prst="rect">
+            <a:avLst/>
+          </a:prstGeom>
+          <a:noFill/>
+        </p:spPr>
+        <p:txBody>
+          <a:bodyPr wrap="square">
+            <a:spAutoFit/>
+          </a:bodyPr>
+          <a:lstStyle/>
+          <a:p>
+            <a:pPr algn="l">
+              <a:defRPr sz="2400" b="0">
+                <a:solidFill>
+                  <a:srgbClr val="374151"/>
+                </a:solidFill>
+                <a:latin typeface="Microsoft YaHei"/>
+              </a:defRPr>
+            </a:pPr>
+            <a:r>
+              <a:t>配置 DeepSeek API Key</a:t>
+            </a:r>
+          </a:p>
+        </p:txBody>
+      </p:sp>
+      <p:sp>
+        <p:nvSpPr>
+          <p:cNvPr id="10" name="Oval 9"/>
+          <p:cNvSpPr/>
+          <p:nvPr/>
+        </p:nvSpPr>
+        <p:spPr>
+          <a:xfrm>
+            <a:off x="2743200" y="4754880"/>
+            <a:ext cx="640080" cy="640080"/>
+          </a:xfrm>
+          <a:prstGeom prst="ellipse">
+            <a:avLst/>
+          </a:prstGeom>
+          <a:solidFill>
+            <a:srgbClr val="A78BFA"/>
+          </a:solidFill>
+          <a:ln>
+            <a:noFill/>
+          </a:ln>
+        </p:spPr>
+        <p:style>
+          <a:lnRef idx="1">
+            <a:schemeClr val="accent1"/>
+          </a:lnRef>
+          <a:fillRef idx="3">
+            <a:schemeClr val="accent1"/>
+          </a:fillRef>
+          <a:effectRef idx="2">
+            <a:schemeClr val="accent1"/>
+          </a:effectRef>
+          <a:fontRef idx="minor">
+            <a:schemeClr val="lt1"/>
+          </a:fontRef>
+        </p:style>
+        <p:txBody>
+          <a:bodyPr rtlCol="0" anchor="ctr" wrap="square"/>
+          <a:lstStyle/>
+          <a:p>
+            <a:pPr algn="ctr">
+              <a:spcBef>
+                <a:spcPts val="0"/>
+              </a:spcBef>
+              <a:defRPr sz="2200">
+                <a:solidFill>
+                  <a:srgbClr val="1F2937"/>
+                </a:solidFill>
+                <a:latin typeface="Microsoft YaHei"/>
+              </a:defRPr>
+            </a:pPr>
+            <a:r>
+              <a:t>4</a:t>
+            </a:r>
+          </a:p>
+        </p:txBody>
+      </p:sp>
+      <p:sp>
+        <p:nvSpPr>
+          <p:cNvPr id="11" name="TextBox 10"/>
+          <p:cNvSpPr txBox="1"/>
+          <p:nvPr/>
+        </p:nvSpPr>
+        <p:spPr>
+          <a:xfrm>
+            <a:off x="3657600" y="4846320"/>
+            <a:ext cx="5486400" cy="548640"/>
+          </a:xfrm>
+          <a:prstGeom prst="rect">
+            <a:avLst/>
+          </a:prstGeom>
+          <a:noFill/>
+        </p:spPr>
+        <p:txBody>
+          <a:bodyPr wrap="square">
+            <a:spAutoFit/>
+          </a:bodyPr>
+          <a:lstStyle/>
+          <a:p>
+            <a:pPr algn="l">
+              <a:defRPr sz="2400" b="0">
+                <a:solidFill>
+                  <a:srgbClr val="374151"/>
+                </a:solidFill>
+                <a:latin typeface="Microsoft YaHei"/>
+              </a:defRPr>
+            </a:pPr>
+            <a:r>
+              <a:t>开始编译</a:t>
+            </a:r>
+          </a:p>
+        </p:txBody>
+      </p:sp>
+    </p:spTree>
+  </p:cSld>
+  <p:clrMapOvr>
+    <a:masterClrMapping/>
+  </p:clrMapOvr>
+</p:sld>
+</file>
+
+<file path=ppt/slides/slide18.xml><?xml version="1.0" encoding="utf-8"?>
+<p:sld xmlns:a="http://schemas.openxmlformats.org/drawingml/2006/main" xmlns:p="http://schemas.openxmlformats.org/presentationml/2006/main" xmlns:r="http://schemas.openxmlformats.org/officeDocument/2006/relationships">
+  <p:cSld>
+    <p:bg>
+      <p:bgPr>
+        <a:solidFill>
+          <a:srgbClr val="F8F7FC"/>
+        </a:solidFill>
+        <a:effectLst/>
+      </p:bgPr>
+    </p:bg>
+    <p:spTree>
+      <p:nvGrpSpPr>
+        <p:cNvPr id="1" name=""/>
+        <p:cNvGrpSpPr/>
+        <p:nvPr/>
+      </p:nvGrpSpPr>
+      <p:grpSpPr/>
+      <p:sp>
+        <p:nvSpPr>
+          <p:cNvPr id="2" name="TextBox 1"/>
+          <p:cNvSpPr txBox="1"/>
+          <p:nvPr/>
+        </p:nvSpPr>
+        <p:spPr>
+          <a:xfrm>
+            <a:off x="0" y="1371600"/>
+            <a:ext cx="12191695" cy="914400"/>
+          </a:xfrm>
+          <a:prstGeom prst="rect">
+            <a:avLst/>
+          </a:prstGeom>
+          <a:noFill/>
+        </p:spPr>
+        <p:txBody>
+          <a:bodyPr wrap="square">
+            <a:spAutoFit/>
+          </a:bodyPr>
+          <a:lstStyle/>
+          <a:p>
+            <a:pPr algn="ctr">
+              <a:defRPr sz="4800" b="1">
+                <a:solidFill>
+                  <a:srgbClr val="1F2937"/>
+                </a:solidFill>
+                <a:latin typeface="Microsoft YaHei"/>
+              </a:defRPr>
+            </a:pPr>
+            <a:r>
+              <a:t>Second Brain</a:t>
+            </a:r>
+          </a:p>
+        </p:txBody>
+      </p:sp>
+      <p:sp>
+        <p:nvSpPr>
+          <p:cNvPr id="3" name="Rectangle 2"/>
+          <p:cNvSpPr/>
+          <p:nvPr/>
+        </p:nvSpPr>
+        <p:spPr>
+          <a:xfrm>
+            <a:off x="5486400" y="2286000"/>
+            <a:ext cx="1188720" cy="25400"/>
+          </a:xfrm>
+          <a:prstGeom prst="rect">
+            <a:avLst/>
+          </a:prstGeom>
+          <a:solidFill>
+            <a:srgbClr val="7C3AED"/>
+          </a:solidFill>
+          <a:ln>
+            <a:noFill/>
+          </a:ln>
+        </p:spPr>
+        <p:style>
+          <a:lnRef idx="1">
+            <a:schemeClr val="accent1"/>
+          </a:lnRef>
+          <a:fillRef idx="3">
+            <a:schemeClr val="accent1"/>
+          </a:fillRef>
+          <a:effectRef idx="2">
+            <a:schemeClr val="accent1"/>
+          </a:effectRef>
+          <a:fontRef idx="minor">
+            <a:schemeClr val="lt1"/>
+          </a:fontRef>
+        </p:style>
+        <p:txBody>
+          <a:bodyPr rtlCol="0" anchor="ctr"/>
+          <a:lstStyle/>
+          <a:p>
+            <a:pPr algn="ctr"/>
+          </a:p>
+        </p:txBody>
+      </p:sp>
+      <p:sp>
+        <p:nvSpPr>
+          <p:cNvPr id="4" name="TextBox 3"/>
+          <p:cNvSpPr txBox="1"/>
+          <p:nvPr/>
+        </p:nvSpPr>
+        <p:spPr>
+          <a:xfrm>
+            <a:off x="0" y="2743200"/>
+            <a:ext cx="12191695" cy="548640"/>
+          </a:xfrm>
+          <a:prstGeom prst="rect">
+            <a:avLst/>
+          </a:prstGeom>
+          <a:noFill/>
+        </p:spPr>
+        <p:txBody>
+          <a:bodyPr wrap="square">
+            <a:spAutoFit/>
+          </a:bodyPr>
+          <a:lstStyle/>
+          <a:p>
+            <a:pPr algn="ctr">
+              <a:defRPr sz="2200" b="0">
+                <a:solidFill>
+                  <a:srgbClr val="6B7280"/>
+                </a:solidFill>
+                <a:latin typeface="Microsoft YaHei"/>
+              </a:defRPr>
+            </a:pPr>
+            <a:r>
+              <a:t>下载地址在简介和评论区置顶</a:t>
+            </a:r>
+          </a:p>
+        </p:txBody>
+      </p:sp>
+      <p:sp>
+        <p:nvSpPr>
+          <p:cNvPr id="5" name="TextBox 4"/>
+          <p:cNvSpPr txBox="1"/>
+          <p:nvPr/>
+        </p:nvSpPr>
+        <p:spPr>
+          <a:xfrm>
+            <a:off x="0" y="3474720"/>
+            <a:ext cx="12191695" cy="548640"/>
+          </a:xfrm>
+          <a:prstGeom prst="rect">
+            <a:avLst/>
+          </a:prstGeom>
+          <a:noFill/>
+        </p:spPr>
+        <p:txBody>
+          <a:bodyPr wrap="square">
+            <a:spAutoFit/>
+          </a:bodyPr>
+          <a:lstStyle/>
+          <a:p>
+            <a:pPr algn="ctr">
+              <a:defRPr sz="1800" b="0">
+                <a:solidFill>
+                  <a:srgbClr val="9CA3AF"/>
+                </a:solidFill>
+                <a:latin typeface="Microsoft YaHei"/>
+              </a:defRPr>
+            </a:pPr>
+            <a:r>
+              <a:t>爱发电: ifdian.net/a/ruowenwang</a:t>
+            </a:r>
+          </a:p>
+        </p:txBody>
+      </p:sp>
+      <p:sp>
+        <p:nvSpPr>
+          <p:cNvPr id="6" name="TextBox 5"/>
+          <p:cNvSpPr txBox="1"/>
+          <p:nvPr/>
+        </p:nvSpPr>
+        <p:spPr>
+          <a:xfrm>
+            <a:off x="0" y="4754880"/>
+            <a:ext cx="12191695" cy="548640"/>
+          </a:xfrm>
+          <a:prstGeom prst="rect">
+            <a:avLst/>
+          </a:prstGeom>
+          <a:noFill/>
+        </p:spPr>
+        <p:txBody>
+          <a:bodyPr wrap="square">
+            <a:spAutoFit/>
+          </a:bodyPr>
+          <a:lstStyle/>
+          <a:p>
             <a:pPr algn="ctr">
               <a:defRPr sz="2400" b="1">
                 <a:solidFill>
-                  <a:srgbClr val="BB99FF"/>
+                  <a:srgbClr val="6D28D9"/>
                 </a:solidFill>
                 <a:latin typeface="Microsoft YaHei"/>
               </a:defRPr>
@@ -6090,7 +7088,7 @@
     <p:bg>
       <p:bgPr>
         <a:solidFill>
-          <a:srgbClr val="1E1E2E"/>
+          <a:srgbClr val="F8F7FC"/>
         </a:solidFill>
         <a:effectLst/>
       </p:bgPr>
@@ -6127,7 +7125,7 @@
             <a:pPr algn="ctr">
               <a:defRPr sz="4000" b="1">
                 <a:solidFill>
-                  <a:srgbClr val="F5F5F5"/>
+                  <a:srgbClr val="1F2937"/>
                 </a:solidFill>
                 <a:latin typeface="Microsoft YaHei"/>
               </a:defRPr>
@@ -6153,7 +7151,7 @@
             <a:avLst/>
           </a:prstGeom>
           <a:solidFill>
-            <a:srgbClr val="A086DA"/>
+            <a:srgbClr val="7C3AED"/>
           </a:solidFill>
           <a:ln>
             <a:noFill/>
@@ -6206,7 +7204,7 @@
             <a:pPr algn="ctr">
               <a:defRPr sz="2000" b="0">
                 <a:solidFill>
-                  <a:srgbClr val="9898B0"/>
+                  <a:srgbClr val="6B7280"/>
                 </a:solidFill>
                 <a:latin typeface="Microsoft YaHei"/>
               </a:defRPr>
@@ -6232,11 +7230,11 @@
             <a:avLst/>
           </a:prstGeom>
           <a:solidFill>
-            <a:srgbClr val="2A273B"/>
+            <a:srgbClr val="EFEDF6"/>
           </a:solidFill>
           <a:ln w="19050">
             <a:solidFill>
-              <a:srgbClr val="3C3852"/>
+              <a:srgbClr val="DDDBE5"/>
             </a:solidFill>
           </a:ln>
         </p:spPr>
@@ -6277,7 +7275,7 @@
             <a:avLst/>
           </a:prstGeom>
           <a:solidFill>
-            <a:srgbClr val="7058A5"/>
+            <a:srgbClr val="A78BFA"/>
           </a:solidFill>
           <a:ln>
             <a:noFill/>
@@ -6307,7 +7305,7 @@
               </a:spcBef>
               <a:defRPr sz="2400">
                 <a:solidFill>
-                  <a:srgbClr val="F5F5F5"/>
+                  <a:srgbClr val="1F2937"/>
                 </a:solidFill>
                 <a:latin typeface="Microsoft YaHei"/>
               </a:defRPr>
@@ -6343,7 +7341,7 @@
             <a:pPr algn="ctr">
               <a:defRPr sz="2200" b="1">
                 <a:solidFill>
-                  <a:srgbClr val="F5F5F5"/>
+                  <a:srgbClr val="1F2937"/>
                 </a:solidFill>
                 <a:latin typeface="Microsoft YaHei"/>
               </a:defRPr>
@@ -6379,7 +7377,7 @@
             <a:pPr algn="ctr">
               <a:defRPr sz="1600" b="0">
                 <a:solidFill>
-                  <a:srgbClr val="9898B0"/>
+                  <a:srgbClr val="6B7280"/>
                 </a:solidFill>
                 <a:latin typeface="Microsoft YaHei"/>
               </a:defRPr>
@@ -6409,11 +7407,11 @@
             <a:avLst/>
           </a:prstGeom>
           <a:solidFill>
-            <a:srgbClr val="2A273B"/>
+            <a:srgbClr val="EFEDF6"/>
           </a:solidFill>
           <a:ln w="19050">
             <a:solidFill>
-              <a:srgbClr val="3C3852"/>
+              <a:srgbClr val="DDDBE5"/>
             </a:solidFill>
           </a:ln>
         </p:spPr>
@@ -6454,7 +7452,7 @@
             <a:avLst/>
           </a:prstGeom>
           <a:solidFill>
-            <a:srgbClr val="7058A5"/>
+            <a:srgbClr val="A78BFA"/>
           </a:solidFill>
           <a:ln>
             <a:noFill/>
@@ -6484,7 +7482,7 @@
               </a:spcBef>
               <a:defRPr sz="2400">
                 <a:solidFill>
-                  <a:srgbClr val="F5F5F5"/>
+                  <a:srgbClr val="1F2937"/>
                 </a:solidFill>
                 <a:latin typeface="Microsoft YaHei"/>
               </a:defRPr>
@@ -6520,7 +7518,7 @@
             <a:pPr algn="ctr">
               <a:defRPr sz="2200" b="1">
                 <a:solidFill>
-                  <a:srgbClr val="F5F5F5"/>
+                  <a:srgbClr val="1F2937"/>
                 </a:solidFill>
                 <a:latin typeface="Microsoft YaHei"/>
               </a:defRPr>
@@ -6556,7 +7554,7 @@
             <a:pPr algn="ctr">
               <a:defRPr sz="1600" b="0">
                 <a:solidFill>
-                  <a:srgbClr val="9898B0"/>
+                  <a:srgbClr val="6B7280"/>
                 </a:solidFill>
                 <a:latin typeface="Microsoft YaHei"/>
               </a:defRPr>
@@ -6586,11 +7584,11 @@
             <a:avLst/>
           </a:prstGeom>
           <a:solidFill>
-            <a:srgbClr val="2A273B"/>
+            <a:srgbClr val="EFEDF6"/>
           </a:solidFill>
           <a:ln w="19050">
             <a:solidFill>
-              <a:srgbClr val="3C3852"/>
+              <a:srgbClr val="DDDBE5"/>
             </a:solidFill>
           </a:ln>
         </p:spPr>
@@ -6631,7 +7629,7 @@
             <a:avLst/>
           </a:prstGeom>
           <a:solidFill>
-            <a:srgbClr val="7058A5"/>
+            <a:srgbClr val="A78BFA"/>
           </a:solidFill>
           <a:ln>
             <a:noFill/>
@@ -6661,7 +7659,7 @@
               </a:spcBef>
               <a:defRPr sz="2400">
                 <a:solidFill>
-                  <a:srgbClr val="F5F5F5"/>
+                  <a:srgbClr val="1F2937"/>
                 </a:solidFill>
                 <a:latin typeface="Microsoft YaHei"/>
               </a:defRPr>
@@ -6697,7 +7695,7 @@
             <a:pPr algn="ctr">
               <a:defRPr sz="2200" b="1">
                 <a:solidFill>
-                  <a:srgbClr val="F5F5F5"/>
+                  <a:srgbClr val="1F2937"/>
                 </a:solidFill>
                 <a:latin typeface="Microsoft YaHei"/>
               </a:defRPr>
@@ -6733,7 +7731,7 @@
             <a:pPr algn="ctr">
               <a:defRPr sz="1600" b="0">
                 <a:solidFill>
-                  <a:srgbClr val="9898B0"/>
+                  <a:srgbClr val="6B7280"/>
                 </a:solidFill>
                 <a:latin typeface="Microsoft YaHei"/>
               </a:defRPr>
@@ -6762,7 +7760,7 @@
     <p:bg>
       <p:bgPr>
         <a:solidFill>
-          <a:srgbClr val="1E1E2E"/>
+          <a:srgbClr val="F8F7FC"/>
         </a:solidFill>
         <a:effectLst/>
       </p:bgPr>
@@ -6799,7 +7797,7 @@
             <a:pPr algn="ctr">
               <a:defRPr sz="3400" b="1">
                 <a:solidFill>
-                  <a:srgbClr val="F5F5F5"/>
+                  <a:srgbClr val="1F2937"/>
                 </a:solidFill>
                 <a:latin typeface="Microsoft YaHei"/>
               </a:defRPr>
@@ -6825,7 +7823,7 @@
             <a:avLst/>
           </a:prstGeom>
           <a:solidFill>
-            <a:srgbClr val="A086DA"/>
+            <a:srgbClr val="7C3AED"/>
           </a:solidFill>
           <a:ln>
             <a:noFill/>
@@ -6868,11 +7866,11 @@
             <a:avLst/>
           </a:prstGeom>
           <a:solidFill>
-            <a:srgbClr val="2A273B"/>
+            <a:srgbClr val="EFEDF6"/>
           </a:solidFill>
           <a:ln w="19050">
             <a:solidFill>
-              <a:srgbClr val="3C3852"/>
+              <a:srgbClr val="DDDBE5"/>
             </a:solidFill>
           </a:ln>
         </p:spPr>
@@ -6900,7 +7898,7 @@
               </a:spcBef>
               <a:defRPr sz="2000">
                 <a:solidFill>
-                  <a:srgbClr val="9898B0"/>
+                  <a:srgbClr val="6B7280"/>
                 </a:solidFill>
                 <a:latin typeface="Microsoft YaHei"/>
               </a:defRPr>
@@ -6926,11 +7924,11 @@
             <a:avLst/>
           </a:prstGeom>
           <a:solidFill>
-            <a:srgbClr val="2A273B"/>
+            <a:srgbClr val="EFEDF6"/>
           </a:solidFill>
           <a:ln w="19050">
             <a:solidFill>
-              <a:srgbClr val="3C3852"/>
+              <a:srgbClr val="DDDBE5"/>
             </a:solidFill>
           </a:ln>
         </p:spPr>
@@ -6958,7 +7956,7 @@
               </a:spcBef>
               <a:defRPr sz="2000">
                 <a:solidFill>
-                  <a:srgbClr val="9898B0"/>
+                  <a:srgbClr val="6B7280"/>
                 </a:solidFill>
                 <a:latin typeface="Microsoft YaHei"/>
               </a:defRPr>
@@ -6984,11 +7982,11 @@
             <a:avLst/>
           </a:prstGeom>
           <a:solidFill>
-            <a:srgbClr val="2A273B"/>
+            <a:srgbClr val="EFEDF6"/>
           </a:solidFill>
           <a:ln w="19050">
             <a:solidFill>
-              <a:srgbClr val="3C3852"/>
+              <a:srgbClr val="DDDBE5"/>
             </a:solidFill>
           </a:ln>
         </p:spPr>
@@ -7016,7 +8014,7 @@
               </a:spcBef>
               <a:defRPr sz="2000">
                 <a:solidFill>
-                  <a:srgbClr val="9898B0"/>
+                  <a:srgbClr val="6B7280"/>
                 </a:solidFill>
                 <a:latin typeface="Microsoft YaHei"/>
               </a:defRPr>
@@ -7042,11 +8040,11 @@
             <a:avLst/>
           </a:prstGeom>
           <a:solidFill>
-            <a:srgbClr val="2A273B"/>
+            <a:srgbClr val="EFEDF6"/>
           </a:solidFill>
           <a:ln w="19050">
             <a:solidFill>
-              <a:srgbClr val="3C3852"/>
+              <a:srgbClr val="DDDBE5"/>
             </a:solidFill>
           </a:ln>
         </p:spPr>
@@ -7074,7 +8072,7 @@
               </a:spcBef>
               <a:defRPr sz="2000">
                 <a:solidFill>
-                  <a:srgbClr val="9898B0"/>
+                  <a:srgbClr val="6B7280"/>
                 </a:solidFill>
                 <a:latin typeface="Microsoft YaHei"/>
               </a:defRPr>
@@ -7100,11 +8098,11 @@
             <a:avLst/>
           </a:prstGeom>
           <a:solidFill>
-            <a:srgbClr val="3D2530"/>
+            <a:srgbClr val="FDEBEB"/>
           </a:solidFill>
           <a:ln w="19050">
             <a:solidFill>
-              <a:srgbClr val="E06C75"/>
+              <a:srgbClr val="DC2626"/>
             </a:solidFill>
           </a:ln>
         </p:spPr>
@@ -7132,7 +8130,7 @@
               </a:spcBef>
               <a:defRPr sz="2400">
                 <a:solidFill>
-                  <a:srgbClr val="E06C75"/>
+                  <a:srgbClr val="DC2626"/>
                 </a:solidFill>
                 <a:latin typeface="Microsoft YaHei"/>
               </a:defRPr>
@@ -7158,11 +8156,11 @@
             <a:avLst/>
           </a:prstGeom>
           <a:solidFill>
-            <a:srgbClr val="3D2530"/>
+            <a:srgbClr val="FDEBEB"/>
           </a:solidFill>
           <a:ln w="19050">
             <a:solidFill>
-              <a:srgbClr val="E06C75"/>
+              <a:srgbClr val="DC2626"/>
             </a:solidFill>
           </a:ln>
         </p:spPr>
@@ -7190,7 +8188,7 @@
               </a:spcBef>
               <a:defRPr sz="2400">
                 <a:solidFill>
-                  <a:srgbClr val="E06C75"/>
+                  <a:srgbClr val="DC2626"/>
                 </a:solidFill>
                 <a:latin typeface="Microsoft YaHei"/>
               </a:defRPr>
@@ -7216,11 +8214,11 @@
             <a:avLst/>
           </a:prstGeom>
           <a:solidFill>
-            <a:srgbClr val="3D2530"/>
+            <a:srgbClr val="FDEBEB"/>
           </a:solidFill>
           <a:ln w="19050">
             <a:solidFill>
-              <a:srgbClr val="E06C75"/>
+              <a:srgbClr val="DC2626"/>
             </a:solidFill>
           </a:ln>
         </p:spPr>
@@ -7248,7 +8246,7 @@
               </a:spcBef>
               <a:defRPr sz="2400">
                 <a:solidFill>
-                  <a:srgbClr val="E06C75"/>
+                  <a:srgbClr val="DC2626"/>
                 </a:solidFill>
                 <a:latin typeface="Microsoft YaHei"/>
               </a:defRPr>
@@ -7273,7 +8271,7 @@
     <p:bg>
       <p:bgPr>
         <a:solidFill>
-          <a:srgbClr val="1E1E2E"/>
+          <a:srgbClr val="F8F7FC"/>
         </a:solidFill>
         <a:effectLst/>
       </p:bgPr>
@@ -7310,7 +8308,7 @@
             <a:pPr algn="ctr">
               <a:defRPr sz="4000" b="1">
                 <a:solidFill>
-                  <a:srgbClr val="F5F5F5"/>
+                  <a:srgbClr val="1F2937"/>
                 </a:solidFill>
                 <a:latin typeface="Microsoft YaHei"/>
               </a:defRPr>
@@ -7336,7 +8334,7 @@
             <a:avLst/>
           </a:prstGeom>
           <a:solidFill>
-            <a:srgbClr val="A086DA"/>
+            <a:srgbClr val="7C3AED"/>
           </a:solidFill>
           <a:ln>
             <a:noFill/>
@@ -7379,11 +8377,11 @@
             <a:avLst/>
           </a:prstGeom>
           <a:solidFill>
-            <a:srgbClr val="2A273B"/>
+            <a:srgbClr val="EFEDF6"/>
           </a:solidFill>
           <a:ln w="19050">
             <a:solidFill>
-              <a:srgbClr val="3C3852"/>
+              <a:srgbClr val="DDDBE5"/>
             </a:solidFill>
           </a:ln>
         </p:spPr>
@@ -7411,7 +8409,7 @@
               </a:spcBef>
               <a:defRPr sz="2400">
                 <a:solidFill>
-                  <a:srgbClr val="9898B0"/>
+                  <a:srgbClr val="6B7280"/>
                 </a:solidFill>
                 <a:latin typeface="Microsoft YaHei"/>
               </a:defRPr>
@@ -7447,7 +8445,7 @@
             <a:pPr algn="l">
               <a:defRPr sz="2400" b="0">
                 <a:solidFill>
-                  <a:srgbClr val="E06C75"/>
+                  <a:srgbClr val="DC2626"/>
                 </a:solidFill>
                 <a:latin typeface="Microsoft YaHei"/>
               </a:defRPr>
@@ -7473,11 +8471,11 @@
             <a:avLst/>
           </a:prstGeom>
           <a:solidFill>
-            <a:srgbClr val="2A273B"/>
+            <a:srgbClr val="EFEDF6"/>
           </a:solidFill>
           <a:ln w="19050">
             <a:solidFill>
-              <a:srgbClr val="3C3852"/>
+              <a:srgbClr val="DDDBE5"/>
             </a:solidFill>
           </a:ln>
         </p:spPr>
@@ -7505,7 +8503,7 @@
               </a:spcBef>
               <a:defRPr sz="2400">
                 <a:solidFill>
-                  <a:srgbClr val="9898B0"/>
+                  <a:srgbClr val="6B7280"/>
                 </a:solidFill>
                 <a:latin typeface="Microsoft YaHei"/>
               </a:defRPr>
@@ -7541,7 +8539,7 @@
             <a:pPr algn="l">
               <a:defRPr sz="2400" b="0">
                 <a:solidFill>
-                  <a:srgbClr val="E06C75"/>
+                  <a:srgbClr val="DC2626"/>
                 </a:solidFill>
                 <a:latin typeface="Microsoft YaHei"/>
               </a:defRPr>
@@ -7567,11 +8565,11 @@
             <a:avLst/>
           </a:prstGeom>
           <a:solidFill>
-            <a:srgbClr val="2A273B"/>
+            <a:srgbClr val="EFEDF6"/>
           </a:solidFill>
           <a:ln w="19050">
             <a:solidFill>
-              <a:srgbClr val="3C3852"/>
+              <a:srgbClr val="DDDBE5"/>
             </a:solidFill>
           </a:ln>
         </p:spPr>
@@ -7599,7 +8597,7 @@
               </a:spcBef>
               <a:defRPr sz="2400">
                 <a:solidFill>
-                  <a:srgbClr val="9898B0"/>
+                  <a:srgbClr val="6B7280"/>
                 </a:solidFill>
                 <a:latin typeface="Microsoft YaHei"/>
               </a:defRPr>
@@ -7635,7 +8633,7 @@
             <a:pPr algn="l">
               <a:defRPr sz="2400" b="0">
                 <a:solidFill>
-                  <a:srgbClr val="E06C75"/>
+                  <a:srgbClr val="DC2626"/>
                 </a:solidFill>
                 <a:latin typeface="Microsoft YaHei"/>
               </a:defRPr>
@@ -7660,7 +8658,7 @@
     <p:bg>
       <p:bgPr>
         <a:solidFill>
-          <a:srgbClr val="1E1E2E"/>
+          <a:srgbClr val="F8F7FC"/>
         </a:solidFill>
         <a:effectLst/>
       </p:bgPr>
@@ -7687,11 +8685,11 @@
             <a:avLst/>
           </a:prstGeom>
           <a:solidFill>
-            <a:srgbClr val="2A2445"/>
+            <a:srgbClr val="DDDBE5"/>
           </a:solidFill>
           <a:ln w="19050">
             <a:solidFill>
-              <a:srgbClr val="7058A5"/>
+              <a:srgbClr val="A78BFA"/>
             </a:solidFill>
           </a:ln>
         </p:spPr>
@@ -7719,7 +8717,7 @@
               </a:spcBef>
               <a:defRPr sz="1300">
                 <a:solidFill>
-                  <a:srgbClr val="A086DA"/>
+                  <a:srgbClr val="7C3AED"/>
                 </a:solidFill>
                 <a:latin typeface="Microsoft YaHei"/>
               </a:defRPr>
@@ -7755,7 +8753,7 @@
             <a:pPr algn="l">
               <a:defRPr sz="3600" b="1">
                 <a:solidFill>
-                  <a:srgbClr val="F5F5F5"/>
+                  <a:srgbClr val="1F2937"/>
                 </a:solidFill>
                 <a:latin typeface="Microsoft YaHei"/>
               </a:defRPr>
@@ -7781,7 +8779,7 @@
             <a:avLst/>
           </a:prstGeom>
           <a:solidFill>
-            <a:srgbClr val="7058A5"/>
+            <a:srgbClr val="A78BFA"/>
           </a:solidFill>
           <a:ln>
             <a:noFill/>
@@ -7834,7 +8832,7 @@
             <a:pPr algn="l">
               <a:defRPr sz="1800" b="0">
                 <a:solidFill>
-                  <a:srgbClr val="9898B0"/>
+                  <a:srgbClr val="6B7280"/>
                 </a:solidFill>
                 <a:latin typeface="Microsoft YaHei"/>
               </a:defRPr>
@@ -7860,11 +8858,11 @@
             <a:avLst/>
           </a:prstGeom>
           <a:solidFill>
-            <a:srgbClr val="2A273B"/>
+            <a:srgbClr val="EFEDF6"/>
           </a:solidFill>
           <a:ln w="19050">
             <a:solidFill>
-              <a:srgbClr val="3C3852"/>
+              <a:srgbClr val="DDDBE5"/>
             </a:solidFill>
           </a:ln>
         </p:spPr>
@@ -7915,7 +8913,7 @@
             <a:pPr algn="ctr">
               <a:defRPr sz="2600" b="1">
                 <a:solidFill>
-                  <a:srgbClr val="F5F5F5"/>
+                  <a:srgbClr val="1F2937"/>
                 </a:solidFill>
                 <a:latin typeface="Microsoft YaHei"/>
               </a:defRPr>
@@ -7951,7 +8949,7 @@
             <a:pPr algn="ctr">
               <a:defRPr sz="1400" b="0">
                 <a:solidFill>
-                  <a:srgbClr val="9898B0"/>
+                  <a:srgbClr val="6B7280"/>
                 </a:solidFill>
                 <a:latin typeface="Microsoft YaHei"/>
               </a:defRPr>
@@ -7981,7 +8979,7 @@
             <a:avLst/>
           </a:prstGeom>
           <a:solidFill>
-            <a:srgbClr val="A086DA"/>
+            <a:srgbClr val="7C3AED"/>
           </a:solidFill>
           <a:ln>
             <a:noFill/>
@@ -8024,11 +9022,11 @@
             <a:avLst/>
           </a:prstGeom>
           <a:solidFill>
-            <a:srgbClr val="302C44"/>
+            <a:srgbClr val="E8E4F3"/>
           </a:solidFill>
           <a:ln w="19050">
             <a:solidFill>
-              <a:srgbClr val="A086DA"/>
+              <a:srgbClr val="7C3AED"/>
             </a:solidFill>
           </a:ln>
         </p:spPr>
@@ -8079,7 +9077,7 @@
             <a:pPr algn="ctr">
               <a:defRPr sz="2600" b="1">
                 <a:solidFill>
-                  <a:srgbClr val="BB99FF"/>
+                  <a:srgbClr val="6D28D9"/>
                 </a:solidFill>
                 <a:latin typeface="Microsoft YaHei"/>
               </a:defRPr>
@@ -8115,7 +9113,7 @@
             <a:pPr algn="ctr">
               <a:defRPr sz="1400" b="0">
                 <a:solidFill>
-                  <a:srgbClr val="9898B0"/>
+                  <a:srgbClr val="6B7280"/>
                 </a:solidFill>
                 <a:latin typeface="Microsoft YaHei"/>
               </a:defRPr>
@@ -8145,7 +9143,7 @@
             <a:avLst/>
           </a:prstGeom>
           <a:solidFill>
-            <a:srgbClr val="A086DA"/>
+            <a:srgbClr val="7C3AED"/>
           </a:solidFill>
           <a:ln>
             <a:noFill/>
@@ -8188,11 +9186,11 @@
             <a:avLst/>
           </a:prstGeom>
           <a:solidFill>
-            <a:srgbClr val="2A273B"/>
+            <a:srgbClr val="EFEDF6"/>
           </a:solidFill>
           <a:ln w="19050">
             <a:solidFill>
-              <a:srgbClr val="3C3852"/>
+              <a:srgbClr val="DDDBE5"/>
             </a:solidFill>
           </a:ln>
         </p:spPr>
@@ -8243,7 +9241,7 @@
             <a:pPr algn="ctr">
               <a:defRPr sz="2600" b="1">
                 <a:solidFill>
-                  <a:srgbClr val="F5F5F5"/>
+                  <a:srgbClr val="1F2937"/>
                 </a:solidFill>
                 <a:latin typeface="Microsoft YaHei"/>
               </a:defRPr>
@@ -8279,7 +9277,7 @@
             <a:pPr algn="ctr">
               <a:defRPr sz="1400" b="0">
                 <a:solidFill>
-                  <a:srgbClr val="9898B0"/>
+                  <a:srgbClr val="6B7280"/>
                 </a:solidFill>
                 <a:latin typeface="Microsoft YaHei"/>
               </a:defRPr>
@@ -8319,7 +9317,7 @@
             <a:pPr algn="ctr">
               <a:defRPr sz="2000" b="1">
                 <a:solidFill>
-                  <a:srgbClr val="BB99FF"/>
+                  <a:srgbClr val="6D28D9"/>
                 </a:solidFill>
                 <a:latin typeface="Microsoft YaHei"/>
               </a:defRPr>
@@ -8344,7 +9342,7 @@
     <p:bg>
       <p:bgPr>
         <a:solidFill>
-          <a:srgbClr val="1E1E2E"/>
+          <a:srgbClr val="F8F7FC"/>
         </a:solidFill>
         <a:effectLst/>
       </p:bgPr>
@@ -8381,7 +9379,7 @@
             <a:pPr algn="ctr">
               <a:defRPr sz="1800" b="0">
                 <a:solidFill>
-                  <a:srgbClr val="A086DA"/>
+                  <a:srgbClr val="7C3AED"/>
                 </a:solidFill>
                 <a:latin typeface="Microsoft YaHei"/>
               </a:defRPr>
@@ -8407,7 +9405,7 @@
             <a:avLst/>
           </a:prstGeom>
           <a:solidFill>
-            <a:srgbClr val="A086DA"/>
+            <a:srgbClr val="7C3AED"/>
           </a:solidFill>
           <a:ln>
             <a:noFill/>
@@ -8460,7 +9458,7 @@
             <a:pPr algn="ctr">
               <a:defRPr sz="3600" b="1">
                 <a:solidFill>
-                  <a:srgbClr val="F5F5F5"/>
+                  <a:srgbClr val="1F2937"/>
                 </a:solidFill>
                 <a:latin typeface="Microsoft YaHei"/>
               </a:defRPr>
@@ -8500,7 +9498,7 @@
             <a:pPr algn="ctr">
               <a:defRPr sz="2000" b="0">
                 <a:solidFill>
-                  <a:srgbClr val="9898B0"/>
+                  <a:srgbClr val="6B7280"/>
                 </a:solidFill>
                 <a:latin typeface="Microsoft YaHei"/>
               </a:defRPr>
@@ -8529,7 +9527,7 @@
     <p:bg>
       <p:bgPr>
         <a:solidFill>
-          <a:srgbClr val="1E1E2E"/>
+          <a:srgbClr val="F8F7FC"/>
         </a:solidFill>
         <a:effectLst/>
       </p:bgPr>
@@ -8566,7 +9564,7 @@
             <a:pPr algn="ctr">
               <a:defRPr sz="3600" b="1">
                 <a:solidFill>
-                  <a:srgbClr val="F5F5F5"/>
+                  <a:srgbClr val="1F2937"/>
                 </a:solidFill>
                 <a:latin typeface="Microsoft YaHei"/>
               </a:defRPr>
@@ -8592,7 +9590,7 @@
             <a:avLst/>
           </a:prstGeom>
           <a:solidFill>
-            <a:srgbClr val="A086DA"/>
+            <a:srgbClr val="7C3AED"/>
           </a:solidFill>
           <a:ln>
             <a:noFill/>
@@ -8635,7 +9633,7 @@
             <a:avLst/>
           </a:prstGeom>
           <a:solidFill>
-            <a:srgbClr val="7058A5"/>
+            <a:srgbClr val="A78BFA"/>
           </a:solidFill>
           <a:ln>
             <a:noFill/>
@@ -8665,7 +9663,7 @@
               </a:spcBef>
               <a:defRPr sz="2800">
                 <a:solidFill>
-                  <a:srgbClr val="F5F5F5"/>
+                  <a:srgbClr val="1F2937"/>
                 </a:solidFill>
                 <a:latin typeface="Microsoft YaHei"/>
               </a:defRPr>
@@ -8701,7 +9699,7 @@
             <a:pPr algn="ctr">
               <a:defRPr sz="2600" b="1">
                 <a:solidFill>
-                  <a:srgbClr val="F5F5F5"/>
+                  <a:srgbClr val="1F2937"/>
                 </a:solidFill>
                 <a:latin typeface="Microsoft YaHei"/>
               </a:defRPr>
@@ -8727,11 +9725,11 @@
             <a:avLst/>
           </a:prstGeom>
           <a:solidFill>
-            <a:srgbClr val="2A273B"/>
+            <a:srgbClr val="EFEDF6"/>
           </a:solidFill>
           <a:ln w="19050">
             <a:solidFill>
-              <a:srgbClr val="3C3852"/>
+              <a:srgbClr val="DDDBE5"/>
             </a:solidFill>
           </a:ln>
         </p:spPr>
@@ -8759,7 +9757,7 @@
               </a:spcBef>
               <a:defRPr sz="1600">
                 <a:solidFill>
-                  <a:srgbClr val="9898B0"/>
+                  <a:srgbClr val="6B7280"/>
                 </a:solidFill>
                 <a:latin typeface="Microsoft YaHei"/>
               </a:defRPr>
@@ -8789,7 +9787,7 @@
             <a:avLst/>
           </a:prstGeom>
           <a:solidFill>
-            <a:srgbClr val="A086DA"/>
+            <a:srgbClr val="7C3AED"/>
           </a:solidFill>
           <a:ln>
             <a:noFill/>
@@ -8832,7 +9830,7 @@
             <a:avLst/>
           </a:prstGeom>
           <a:solidFill>
-            <a:srgbClr val="7058A5"/>
+            <a:srgbClr val="A78BFA"/>
           </a:solidFill>
           <a:ln>
             <a:noFill/>
@@ -8862,7 +9860,7 @@
               </a:spcBef>
               <a:defRPr sz="2800">
                 <a:solidFill>
-                  <a:srgbClr val="F5F5F5"/>
+                  <a:srgbClr val="1F2937"/>
                 </a:solidFill>
                 <a:latin typeface="Microsoft YaHei"/>
               </a:defRPr>
@@ -8898,7 +9896,7 @@
             <a:pPr algn="ctr">
               <a:defRPr sz="2600" b="1">
                 <a:solidFill>
-                  <a:srgbClr val="F5F5F5"/>
+                  <a:srgbClr val="1F2937"/>
                 </a:solidFill>
                 <a:latin typeface="Microsoft YaHei"/>
               </a:defRPr>
@@ -8924,11 +9922,11 @@
             <a:avLst/>
           </a:prstGeom>
           <a:solidFill>
-            <a:srgbClr val="302C44"/>
+            <a:srgbClr val="E8E4F3"/>
           </a:solidFill>
           <a:ln w="19050">
             <a:solidFill>
-              <a:srgbClr val="A086DA"/>
+              <a:srgbClr val="7C3AED"/>
             </a:solidFill>
           </a:ln>
         </p:spPr>
@@ -8956,7 +9954,7 @@
               </a:spcBef>
               <a:defRPr sz="1600">
                 <a:solidFill>
-                  <a:srgbClr val="9898B0"/>
+                  <a:srgbClr val="6B7280"/>
                 </a:solidFill>
                 <a:latin typeface="Microsoft YaHei"/>
               </a:defRPr>
@@ -8986,7 +9984,7 @@
             <a:avLst/>
           </a:prstGeom>
           <a:solidFill>
-            <a:srgbClr val="A086DA"/>
+            <a:srgbClr val="7C3AED"/>
           </a:solidFill>
           <a:ln>
             <a:noFill/>
@@ -9029,7 +10027,7 @@
             <a:avLst/>
           </a:prstGeom>
           <a:solidFill>
-            <a:srgbClr val="7058A5"/>
+            <a:srgbClr val="A78BFA"/>
           </a:solidFill>
           <a:ln>
             <a:noFill/>
@@ -9059,7 +10057,7 @@
               </a:spcBef>
               <a:defRPr sz="2800">
                 <a:solidFill>
-                  <a:srgbClr val="F5F5F5"/>
+                  <a:srgbClr val="1F2937"/>
                 </a:solidFill>
                 <a:latin typeface="Microsoft YaHei"/>
               </a:defRPr>
@@ -9095,7 +10093,7 @@
             <a:pPr algn="ctr">
               <a:defRPr sz="2600" b="1">
                 <a:solidFill>
-                  <a:srgbClr val="F5F5F5"/>
+                  <a:srgbClr val="1F2937"/>
                 </a:solidFill>
                 <a:latin typeface="Microsoft YaHei"/>
               </a:defRPr>
@@ -9121,11 +10119,11 @@
             <a:avLst/>
           </a:prstGeom>
           <a:solidFill>
-            <a:srgbClr val="2A273B"/>
+            <a:srgbClr val="EFEDF6"/>
           </a:solidFill>
           <a:ln w="19050">
             <a:solidFill>
-              <a:srgbClr val="3C3852"/>
+              <a:srgbClr val="DDDBE5"/>
             </a:solidFill>
           </a:ln>
         </p:spPr>
@@ -9153,7 +10151,7 @@
               </a:spcBef>
               <a:defRPr sz="1600">
                 <a:solidFill>
-                  <a:srgbClr val="9898B0"/>
+                  <a:srgbClr val="6B7280"/>
                 </a:solidFill>
                 <a:latin typeface="Microsoft YaHei"/>
               </a:defRPr>
@@ -9182,7 +10180,7 @@
     <p:bg>
       <p:bgPr>
         <a:solidFill>
-          <a:srgbClr val="1E1E2E"/>
+          <a:srgbClr val="F8F7FC"/>
         </a:solidFill>
         <a:effectLst/>
       </p:bgPr>
@@ -9209,11 +10207,11 @@
             <a:avLst/>
           </a:prstGeom>
           <a:solidFill>
-            <a:srgbClr val="2A2445"/>
+            <a:srgbClr val="DDDBE5"/>
           </a:solidFill>
           <a:ln w="19050">
             <a:solidFill>
-              <a:srgbClr val="7058A5"/>
+              <a:srgbClr val="A78BFA"/>
             </a:solidFill>
           </a:ln>
         </p:spPr>
@@ -9241,7 +10239,7 @@
               </a:spcBef>
               <a:defRPr sz="1300">
                 <a:solidFill>
-                  <a:srgbClr val="A086DA"/>
+                  <a:srgbClr val="7C3AED"/>
                 </a:solidFill>
                 <a:latin typeface="Microsoft YaHei"/>
               </a:defRPr>
@@ -9277,7 +10275,7 @@
             <a:pPr algn="l">
               <a:defRPr sz="3600" b="1">
                 <a:solidFill>
-                  <a:srgbClr val="F5F5F5"/>
+                  <a:srgbClr val="1F2937"/>
                 </a:solidFill>
                 <a:latin typeface="Microsoft YaHei"/>
               </a:defRPr>
@@ -9303,7 +10301,7 @@
             <a:avLst/>
           </a:prstGeom>
           <a:solidFill>
-            <a:srgbClr val="7058A5"/>
+            <a:srgbClr val="A78BFA"/>
           </a:solidFill>
           <a:ln>
             <a:noFill/>
@@ -9356,7 +10354,7 @@
             <a:pPr algn="l">
               <a:defRPr sz="2400" b="0">
                 <a:solidFill>
-                  <a:srgbClr val="DCDCDC"/>
+                  <a:srgbClr val="374151"/>
                 </a:solidFill>
                 <a:latin typeface="Microsoft YaHei"/>
               </a:defRPr>
@@ -9392,7 +10390,7 @@
             <a:pPr algn="l">
               <a:defRPr sz="2400" b="0">
                 <a:solidFill>
-                  <a:srgbClr val="DCDCDC"/>
+                  <a:srgbClr val="374151"/>
                 </a:solidFill>
                 <a:latin typeface="Microsoft YaHei"/>
               </a:defRPr>
@@ -9428,7 +10426,7 @@
             <a:pPr algn="l">
               <a:defRPr sz="2400" b="0">
                 <a:solidFill>
-                  <a:srgbClr val="DCDCDC"/>
+                  <a:srgbClr val="374151"/>
                 </a:solidFill>
                 <a:latin typeface="Microsoft YaHei"/>
               </a:defRPr>
@@ -9464,7 +10462,7 @@
             <a:pPr algn="l">
               <a:defRPr sz="2400" b="0">
                 <a:solidFill>
-                  <a:srgbClr val="DCDCDC"/>
+                  <a:srgbClr val="374151"/>
                 </a:solidFill>
                 <a:latin typeface="Microsoft YaHei"/>
               </a:defRPr>
@@ -9489,7 +10487,7 @@
     <p:bg>
       <p:bgPr>
         <a:solidFill>
-          <a:srgbClr val="1E1E2E"/>
+          <a:srgbClr val="F8F7FC"/>
         </a:solidFill>
         <a:effectLst/>
       </p:bgPr>
@@ -9516,11 +10514,11 @@
             <a:avLst/>
           </a:prstGeom>
           <a:solidFill>
-            <a:srgbClr val="2A2445"/>
+            <a:srgbClr val="DDDBE5"/>
           </a:solidFill>
           <a:ln w="19050">
             <a:solidFill>
-              <a:srgbClr val="7058A5"/>
+              <a:srgbClr val="A78BFA"/>
             </a:solidFill>
           </a:ln>
         </p:spPr>
@@ -9548,7 +10546,7 @@
               </a:spcBef>
               <a:defRPr sz="1300">
                 <a:solidFill>
-                  <a:srgbClr val="A086DA"/>
+                  <a:srgbClr val="7C3AED"/>
                 </a:solidFill>
                 <a:latin typeface="Microsoft YaHei"/>
               </a:defRPr>
@@ -9584,7 +10582,7 @@
             <a:pPr algn="l">
               <a:defRPr sz="3600" b="1">
                 <a:solidFill>
-                  <a:srgbClr val="F5F5F5"/>
+                  <a:srgbClr val="1F2937"/>
                 </a:solidFill>
                 <a:latin typeface="Microsoft YaHei"/>
               </a:defRPr>
@@ -9610,7 +10608,7 @@
             <a:avLst/>
           </a:prstGeom>
           <a:solidFill>
-            <a:srgbClr val="7058A5"/>
+            <a:srgbClr val="A78BFA"/>
           </a:solidFill>
           <a:ln>
             <a:noFill/>
@@ -9663,7 +10661,7 @@
             <a:pPr algn="l">
               <a:defRPr sz="2400" b="0">
                 <a:solidFill>
-                  <a:srgbClr val="DCDCDC"/>
+                  <a:srgbClr val="374151"/>
                 </a:solidFill>
                 <a:latin typeface="Microsoft YaHei"/>
               </a:defRPr>
@@ -9699,7 +10697,7 @@
             <a:pPr algn="l">
               <a:defRPr sz="2400" b="0">
                 <a:solidFill>
-                  <a:srgbClr val="DCDCDC"/>
+                  <a:srgbClr val="374151"/>
                 </a:solidFill>
                 <a:latin typeface="Microsoft YaHei"/>
               </a:defRPr>
@@ -9735,7 +10733,7 @@
             <a:pPr algn="l">
               <a:defRPr sz="2400" b="0">
                 <a:solidFill>
-                  <a:srgbClr val="DCDCDC"/>
+                  <a:srgbClr val="374151"/>
                 </a:solidFill>
                 <a:latin typeface="Microsoft YaHei"/>
               </a:defRPr>
@@ -9771,7 +10769,7 @@
             <a:pPr algn="l">
               <a:defRPr sz="2400" b="0">
                 <a:solidFill>
-                  <a:srgbClr val="DCDCDC"/>
+                  <a:srgbClr val="374151"/>
                 </a:solidFill>
                 <a:latin typeface="Microsoft YaHei"/>
               </a:defRPr>
